--- a/Docs/PPT/Version5.pptx
+++ b/Docs/PPT/Version5.pptx
@@ -7,14 +7,15 @@
   <p:sldIdLst>
     <p:sldId id="259" r:id="rId3"/>
     <p:sldId id="262" r:id="rId4"/>
-    <p:sldId id="264" r:id="rId5"/>
-    <p:sldId id="266" r:id="rId6"/>
-    <p:sldId id="265" r:id="rId7"/>
+    <p:sldId id="268" r:id="rId5"/>
+    <p:sldId id="264" r:id="rId6"/>
+    <p:sldId id="266" r:id="rId7"/>
+    <p:sldId id="265" r:id="rId8"/>
   </p:sldIdLst>
   <p:sldSz cx="12192000" cy="6858000"/>
   <p:notesSz cx="6858000" cy="9144000"/>
   <p:custDataLst>
-    <p:tags r:id="rId11"/>
+    <p:tags r:id="rId12"/>
   </p:custDataLst>
   <p:defaultTextStyle>
     <a:defPPr>
@@ -3070,7 +3071,7 @@
         <p:spPr>
           <a:xfrm>
             <a:off x="1428750" y="742950"/>
-            <a:ext cx="1022985" cy="368300"/>
+            <a:ext cx="1022985" cy="368935"/>
           </a:xfrm>
           <a:prstGeom prst="rect">
             <a:avLst/>
@@ -3079,21 +3080,21 @@
         </p:spPr>
         <p:txBody>
           <a:bodyPr wrap="square" rtlCol="0">
-            <a:spAutoFit/>
+            <a:noAutofit/>
           </a:bodyPr>
           <a:p>
             <a:pPr algn="ctr"/>
             <a:r>
-              <a:rPr lang="en-US" altLang="zh-CN" b="1">
+              <a:rPr lang="en-US" altLang="zh-CN" sz="1200" b="1">
                 <a:solidFill>
                   <a:schemeClr val="bg2"/>
                 </a:solidFill>
                 <a:latin typeface="+mj-ea"/>
                 <a:ea typeface="+mj-ea"/>
               </a:rPr>
-              <a:t>EchoX</a:t>
+              <a:t>Metaware</a:t>
             </a:r>
-            <a:endParaRPr lang="en-US" altLang="zh-CN" b="1">
+            <a:endParaRPr lang="en-US" altLang="zh-CN" sz="1200" b="1">
               <a:solidFill>
                 <a:schemeClr val="bg2"/>
               </a:solidFill>
@@ -3467,6 +3468,2588 @@
 </file>
 
 <file path=ppt/slides/slide2.xml><?xml version="1.0" encoding="utf-8"?>
+<p:sld xmlns:a="http://schemas.openxmlformats.org/drawingml/2006/main" xmlns:r="http://schemas.openxmlformats.org/officeDocument/2006/relationships" xmlns:p="http://schemas.openxmlformats.org/presentationml/2006/main">
+  <p:cSld>
+    <p:spTree>
+      <p:nvGrpSpPr>
+        <p:cNvPr id="1" name=""/>
+        <p:cNvGrpSpPr/>
+        <p:nvPr/>
+      </p:nvGrpSpPr>
+      <p:grpSpPr/>
+      <p:sp>
+        <p:nvSpPr>
+          <p:cNvPr id="8" name="矩形 7"/>
+          <p:cNvSpPr/>
+          <p:nvPr>
+            <p:custDataLst>
+              <p:tags r:id="rId1"/>
+            </p:custDataLst>
+          </p:nvPr>
+        </p:nvSpPr>
+        <p:spPr>
+          <a:xfrm>
+            <a:off x="1504950" y="746125"/>
+            <a:ext cx="6908800" cy="4965700"/>
+          </a:xfrm>
+          <a:prstGeom prst="rect">
+            <a:avLst/>
+          </a:prstGeom>
+          <a:solidFill>
+            <a:srgbClr val="F8F9FF"/>
+          </a:solidFill>
+          <a:ln>
+            <a:noFill/>
+          </a:ln>
+          <a:effectLst>
+            <a:outerShdw blurRad="165100" algn="ctr" rotWithShape="0">
+              <a:prstClr val="black">
+                <a:alpha val="24000"/>
+              </a:prstClr>
+            </a:outerShdw>
+          </a:effectLst>
+        </p:spPr>
+        <p:style>
+          <a:lnRef idx="2">
+            <a:schemeClr val="accent1">
+              <a:lumMod val="75000"/>
+            </a:schemeClr>
+          </a:lnRef>
+          <a:fillRef idx="1">
+            <a:schemeClr val="accent1"/>
+          </a:fillRef>
+          <a:effectRef idx="0">
+            <a:srgbClr val="FFFFFF"/>
+          </a:effectRef>
+          <a:fontRef idx="minor">
+            <a:schemeClr val="lt1"/>
+          </a:fontRef>
+        </p:style>
+        <p:txBody>
+          <a:bodyPr rtlCol="0" anchor="ctr"/>
+          <a:p>
+            <a:pPr algn="ctr"/>
+            <a:endParaRPr lang="zh-CN" altLang="en-US">
+              <a:solidFill>
+                <a:schemeClr val="bg1"/>
+              </a:solidFill>
+            </a:endParaRPr>
+          </a:p>
+        </p:txBody>
+      </p:sp>
+      <p:sp>
+        <p:nvSpPr>
+          <p:cNvPr id="53" name="矩形 52"/>
+          <p:cNvSpPr/>
+          <p:nvPr/>
+        </p:nvSpPr>
+        <p:spPr>
+          <a:xfrm>
+            <a:off x="2422525" y="742950"/>
+            <a:ext cx="5991225" cy="1077595"/>
+          </a:xfrm>
+          <a:prstGeom prst="rect">
+            <a:avLst/>
+          </a:prstGeom>
+          <a:solidFill>
+            <a:srgbClr val="FDFDFF"/>
+          </a:solidFill>
+          <a:ln>
+            <a:noFill/>
+          </a:ln>
+          <a:effectLst>
+            <a:outerShdw blurRad="88900" dir="5400000" algn="t" rotWithShape="0">
+              <a:prstClr val="black">
+                <a:alpha val="6000"/>
+              </a:prstClr>
+            </a:outerShdw>
+          </a:effectLst>
+        </p:spPr>
+        <p:style>
+          <a:lnRef idx="2">
+            <a:schemeClr val="accent1">
+              <a:lumMod val="75000"/>
+            </a:schemeClr>
+          </a:lnRef>
+          <a:fillRef idx="1">
+            <a:schemeClr val="accent1"/>
+          </a:fillRef>
+          <a:effectRef idx="0">
+            <a:srgbClr val="FFFFFF"/>
+          </a:effectRef>
+          <a:fontRef idx="minor">
+            <a:schemeClr val="lt1"/>
+          </a:fontRef>
+        </p:style>
+        <p:txBody>
+          <a:bodyPr rtlCol="0" anchor="ctr"/>
+          <a:p>
+            <a:pPr algn="ctr"/>
+            <a:endParaRPr lang="zh-CN" altLang="en-US"/>
+          </a:p>
+        </p:txBody>
+      </p:sp>
+      <p:pic>
+        <p:nvPicPr>
+          <p:cNvPr id="21" name="图片 20"/>
+          <p:cNvPicPr>
+            <a:picLocks noChangeAspect="1"/>
+          </p:cNvPicPr>
+          <p:nvPr>
+            <p:custDataLst>
+              <p:tags r:id="rId2"/>
+            </p:custDataLst>
+          </p:nvPr>
+        </p:nvPicPr>
+        <p:blipFill>
+          <a:blip r:embed="rId3"/>
+          <a:stretch>
+            <a:fillRect/>
+          </a:stretch>
+        </p:blipFill>
+        <p:spPr>
+          <a:xfrm>
+            <a:off x="7576185" y="746125"/>
+            <a:ext cx="837565" cy="177800"/>
+          </a:xfrm>
+          <a:prstGeom prst="rect">
+            <a:avLst/>
+          </a:prstGeom>
+        </p:spPr>
+      </p:pic>
+      <p:pic>
+        <p:nvPicPr>
+          <p:cNvPr id="6" name="图片 5" descr="search"/>
+          <p:cNvPicPr>
+            <a:picLocks noChangeAspect="1"/>
+          </p:cNvPicPr>
+          <p:nvPr/>
+        </p:nvPicPr>
+        <p:blipFill>
+          <a:blip r:embed="rId4">
+            <a:alphaModFix amt="65000"/>
+          </a:blip>
+          <a:stretch>
+            <a:fillRect/>
+          </a:stretch>
+        </p:blipFill>
+        <p:spPr>
+          <a:xfrm>
+            <a:off x="2689860" y="941705"/>
+            <a:ext cx="193040" cy="193040"/>
+          </a:xfrm>
+          <a:prstGeom prst="rect">
+            <a:avLst/>
+          </a:prstGeom>
+          <a:effectLst/>
+        </p:spPr>
+      </p:pic>
+      <p:sp>
+        <p:nvSpPr>
+          <p:cNvPr id="7" name="文本框 6"/>
+          <p:cNvSpPr txBox="1"/>
+          <p:nvPr/>
+        </p:nvSpPr>
+        <p:spPr>
+          <a:xfrm>
+            <a:off x="2772410" y="941705"/>
+            <a:ext cx="656590" cy="213995"/>
+          </a:xfrm>
+          <a:prstGeom prst="rect">
+            <a:avLst/>
+          </a:prstGeom>
+          <a:noFill/>
+        </p:spPr>
+        <p:txBody>
+          <a:bodyPr wrap="square" rtlCol="0">
+            <a:spAutoFit/>
+          </a:bodyPr>
+          <a:p>
+            <a:pPr algn="ctr"/>
+            <a:r>
+              <a:rPr lang="zh-CN" altLang="en-US" sz="800">
+                <a:solidFill>
+                  <a:schemeClr val="bg1">
+                    <a:lumMod val="85000"/>
+                  </a:schemeClr>
+                </a:solidFill>
+              </a:rPr>
+              <a:t>搜索</a:t>
+            </a:r>
+            <a:endParaRPr lang="zh-CN" altLang="en-US" sz="800">
+              <a:solidFill>
+                <a:schemeClr val="bg1">
+                  <a:lumMod val="85000"/>
+                </a:schemeClr>
+              </a:solidFill>
+            </a:endParaRPr>
+          </a:p>
+        </p:txBody>
+      </p:sp>
+      <p:grpSp>
+        <p:nvGrpSpPr>
+          <p:cNvPr id="47" name="组合 46"/>
+          <p:cNvGrpSpPr/>
+          <p:nvPr/>
+        </p:nvGrpSpPr>
+        <p:grpSpPr>
+          <a:xfrm>
+            <a:off x="2630170" y="1290320"/>
+            <a:ext cx="3101340" cy="213995"/>
+            <a:chOff x="4236" y="2032"/>
+            <a:chExt cx="4884" cy="337"/>
+          </a:xfrm>
+        </p:grpSpPr>
+        <p:sp>
+          <p:nvSpPr>
+            <p:cNvPr id="13" name="文本框 12"/>
+            <p:cNvSpPr txBox="1"/>
+            <p:nvPr>
+              <p:custDataLst>
+                <p:tags r:id="rId5"/>
+              </p:custDataLst>
+            </p:nvPr>
+          </p:nvSpPr>
+          <p:spPr>
+            <a:xfrm>
+              <a:off x="4236" y="2032"/>
+              <a:ext cx="642" cy="337"/>
+            </a:xfrm>
+            <a:prstGeom prst="rect">
+              <a:avLst/>
+            </a:prstGeom>
+            <a:noFill/>
+          </p:spPr>
+          <p:txBody>
+            <a:bodyPr wrap="square" rtlCol="0">
+              <a:spAutoFit/>
+            </a:bodyPr>
+            <a:p>
+              <a:pPr algn="l"/>
+              <a:r>
+                <a:rPr lang="zh-CN" altLang="en-US" sz="800">
+                  <a:solidFill>
+                    <a:schemeClr val="bg1">
+                      <a:lumMod val="50000"/>
+                    </a:schemeClr>
+                  </a:solidFill>
+                </a:rPr>
+                <a:t>类型：</a:t>
+              </a:r>
+              <a:endParaRPr lang="zh-CN" altLang="en-US" sz="800">
+                <a:solidFill>
+                  <a:schemeClr val="bg1">
+                    <a:lumMod val="50000"/>
+                  </a:schemeClr>
+                </a:solidFill>
+              </a:endParaRPr>
+            </a:p>
+          </p:txBody>
+        </p:sp>
+        <p:grpSp>
+          <p:nvGrpSpPr>
+            <p:cNvPr id="25" name="组合 24"/>
+            <p:cNvGrpSpPr/>
+            <p:nvPr/>
+          </p:nvGrpSpPr>
+          <p:grpSpPr>
+            <a:xfrm>
+              <a:off x="5478" y="2032"/>
+              <a:ext cx="712" cy="337"/>
+              <a:chOff x="5741" y="645"/>
+              <a:chExt cx="712" cy="337"/>
+            </a:xfrm>
+          </p:grpSpPr>
+          <p:sp>
+            <p:nvSpPr>
+              <p:cNvPr id="23" name="文本框 22"/>
+              <p:cNvSpPr txBox="1"/>
+              <p:nvPr>
+                <p:custDataLst>
+                  <p:tags r:id="rId6"/>
+                </p:custDataLst>
+              </p:nvPr>
+            </p:nvSpPr>
+            <p:spPr>
+              <a:xfrm>
+                <a:off x="5811" y="645"/>
+                <a:ext cx="642" cy="337"/>
+              </a:xfrm>
+              <a:prstGeom prst="rect">
+                <a:avLst/>
+              </a:prstGeom>
+              <a:noFill/>
+            </p:spPr>
+            <p:txBody>
+              <a:bodyPr wrap="square" rtlCol="0">
+                <a:spAutoFit/>
+              </a:bodyPr>
+              <a:p>
+                <a:pPr algn="l"/>
+                <a:r>
+                  <a:rPr lang="zh-CN" altLang="en-US" sz="800">
+                    <a:solidFill>
+                      <a:schemeClr val="bg1">
+                        <a:lumMod val="50000"/>
+                      </a:schemeClr>
+                    </a:solidFill>
+                  </a:rPr>
+                  <a:t>挂件</a:t>
+                </a:r>
+                <a:endParaRPr lang="zh-CN" altLang="en-US" sz="800">
+                  <a:solidFill>
+                    <a:schemeClr val="bg1">
+                      <a:lumMod val="50000"/>
+                    </a:schemeClr>
+                  </a:solidFill>
+                </a:endParaRPr>
+              </a:p>
+            </p:txBody>
+          </p:sp>
+          <p:sp>
+            <p:nvSpPr>
+              <p:cNvPr id="24" name="矩形 23"/>
+              <p:cNvSpPr/>
+              <p:nvPr/>
+            </p:nvSpPr>
+            <p:spPr>
+              <a:xfrm>
+                <a:off x="5741" y="753"/>
+                <a:ext cx="120" cy="120"/>
+              </a:xfrm>
+              <a:prstGeom prst="rect">
+                <a:avLst/>
+              </a:prstGeom>
+              <a:noFill/>
+              <a:ln>
+                <a:solidFill>
+                  <a:srgbClr val="7F7F7F">
+                    <a:alpha val="70000"/>
+                  </a:srgbClr>
+                </a:solidFill>
+              </a:ln>
+            </p:spPr>
+            <p:style>
+              <a:lnRef idx="2">
+                <a:schemeClr val="accent1">
+                  <a:lumMod val="75000"/>
+                </a:schemeClr>
+              </a:lnRef>
+              <a:fillRef idx="1">
+                <a:schemeClr val="accent1"/>
+              </a:fillRef>
+              <a:effectRef idx="0">
+                <a:srgbClr val="FFFFFF"/>
+              </a:effectRef>
+              <a:fontRef idx="minor">
+                <a:schemeClr val="lt1"/>
+              </a:fontRef>
+            </p:style>
+            <p:txBody>
+              <a:bodyPr rtlCol="0" anchor="ctr"/>
+              <a:p>
+                <a:pPr algn="ctr"/>
+                <a:endParaRPr lang="zh-CN" altLang="en-US"/>
+              </a:p>
+            </p:txBody>
+          </p:sp>
+        </p:grpSp>
+        <p:grpSp>
+          <p:nvGrpSpPr>
+            <p:cNvPr id="33" name="组合 32"/>
+            <p:cNvGrpSpPr/>
+            <p:nvPr/>
+          </p:nvGrpSpPr>
+          <p:grpSpPr>
+            <a:xfrm>
+              <a:off x="6623" y="2032"/>
+              <a:ext cx="712" cy="337"/>
+              <a:chOff x="5741" y="645"/>
+              <a:chExt cx="712" cy="337"/>
+            </a:xfrm>
+          </p:grpSpPr>
+          <p:sp>
+            <p:nvSpPr>
+              <p:cNvPr id="34" name="文本框 33"/>
+              <p:cNvSpPr txBox="1"/>
+              <p:nvPr>
+                <p:custDataLst>
+                  <p:tags r:id="rId7"/>
+                </p:custDataLst>
+              </p:nvPr>
+            </p:nvSpPr>
+            <p:spPr>
+              <a:xfrm>
+                <a:off x="5811" y="645"/>
+                <a:ext cx="642" cy="337"/>
+              </a:xfrm>
+              <a:prstGeom prst="rect">
+                <a:avLst/>
+              </a:prstGeom>
+              <a:noFill/>
+            </p:spPr>
+            <p:txBody>
+              <a:bodyPr wrap="square" rtlCol="0">
+                <a:spAutoFit/>
+              </a:bodyPr>
+              <a:p>
+                <a:pPr algn="l"/>
+                <a:r>
+                  <a:rPr lang="zh-CN" altLang="en-US" sz="800">
+                    <a:solidFill>
+                      <a:schemeClr val="bg1">
+                        <a:lumMod val="50000"/>
+                      </a:schemeClr>
+                    </a:solidFill>
+                  </a:rPr>
+                  <a:t>壁纸</a:t>
+                </a:r>
+                <a:endParaRPr lang="zh-CN" altLang="en-US" sz="800">
+                  <a:solidFill>
+                    <a:schemeClr val="bg1">
+                      <a:lumMod val="50000"/>
+                    </a:schemeClr>
+                  </a:solidFill>
+                </a:endParaRPr>
+              </a:p>
+            </p:txBody>
+          </p:sp>
+          <p:sp>
+            <p:nvSpPr>
+              <p:cNvPr id="35" name="矩形 34"/>
+              <p:cNvSpPr/>
+              <p:nvPr>
+                <p:custDataLst>
+                  <p:tags r:id="rId8"/>
+                </p:custDataLst>
+              </p:nvPr>
+            </p:nvSpPr>
+            <p:spPr>
+              <a:xfrm>
+                <a:off x="5741" y="753"/>
+                <a:ext cx="120" cy="120"/>
+              </a:xfrm>
+              <a:prstGeom prst="rect">
+                <a:avLst/>
+              </a:prstGeom>
+              <a:noFill/>
+              <a:ln>
+                <a:solidFill>
+                  <a:srgbClr val="7F7F7F">
+                    <a:alpha val="70000"/>
+                  </a:srgbClr>
+                </a:solidFill>
+              </a:ln>
+            </p:spPr>
+            <p:style>
+              <a:lnRef idx="2">
+                <a:schemeClr val="accent1">
+                  <a:lumMod val="75000"/>
+                </a:schemeClr>
+              </a:lnRef>
+              <a:fillRef idx="1">
+                <a:schemeClr val="accent1"/>
+              </a:fillRef>
+              <a:effectRef idx="0">
+                <a:srgbClr val="FFFFFF"/>
+              </a:effectRef>
+              <a:fontRef idx="minor">
+                <a:schemeClr val="lt1"/>
+              </a:fontRef>
+            </p:style>
+            <p:txBody>
+              <a:bodyPr rtlCol="0" anchor="ctr"/>
+              <a:p>
+                <a:pPr algn="ctr"/>
+                <a:endParaRPr lang="zh-CN" altLang="en-US"/>
+              </a:p>
+            </p:txBody>
+          </p:sp>
+        </p:grpSp>
+        <p:grpSp>
+          <p:nvGrpSpPr>
+            <p:cNvPr id="36" name="组合 35"/>
+            <p:cNvGrpSpPr/>
+            <p:nvPr/>
+          </p:nvGrpSpPr>
+          <p:grpSpPr>
+            <a:xfrm>
+              <a:off x="7768" y="2032"/>
+              <a:ext cx="1352" cy="337"/>
+              <a:chOff x="5741" y="645"/>
+              <a:chExt cx="1352" cy="337"/>
+            </a:xfrm>
+          </p:grpSpPr>
+          <p:sp>
+            <p:nvSpPr>
+              <p:cNvPr id="37" name="文本框 36"/>
+              <p:cNvSpPr txBox="1"/>
+              <p:nvPr>
+                <p:custDataLst>
+                  <p:tags r:id="rId9"/>
+                </p:custDataLst>
+              </p:nvPr>
+            </p:nvSpPr>
+            <p:spPr>
+              <a:xfrm>
+                <a:off x="5811" y="645"/>
+                <a:ext cx="1282" cy="337"/>
+              </a:xfrm>
+              <a:prstGeom prst="rect">
+                <a:avLst/>
+              </a:prstGeom>
+              <a:noFill/>
+            </p:spPr>
+            <p:txBody>
+              <a:bodyPr wrap="square" rtlCol="0">
+                <a:spAutoFit/>
+              </a:bodyPr>
+              <a:p>
+                <a:pPr algn="l"/>
+                <a:r>
+                  <a:rPr lang="zh-CN" altLang="en-US" sz="800">
+                    <a:solidFill>
+                      <a:schemeClr val="bg1">
+                        <a:lumMod val="50000"/>
+                      </a:schemeClr>
+                    </a:solidFill>
+                  </a:rPr>
+                  <a:t>漫游</a:t>
+                </a:r>
+                <a:r>
+                  <a:rPr lang="zh-CN" altLang="en-US" sz="800">
+                    <a:solidFill>
+                      <a:schemeClr val="bg1">
+                        <a:lumMod val="50000"/>
+                      </a:schemeClr>
+                    </a:solidFill>
+                  </a:rPr>
+                  <a:t>场景</a:t>
+                </a:r>
+                <a:endParaRPr lang="zh-CN" altLang="en-US" sz="800">
+                  <a:solidFill>
+                    <a:schemeClr val="bg1">
+                      <a:lumMod val="50000"/>
+                    </a:schemeClr>
+                  </a:solidFill>
+                </a:endParaRPr>
+              </a:p>
+            </p:txBody>
+          </p:sp>
+          <p:sp>
+            <p:nvSpPr>
+              <p:cNvPr id="38" name="矩形 37"/>
+              <p:cNvSpPr/>
+              <p:nvPr>
+                <p:custDataLst>
+                  <p:tags r:id="rId10"/>
+                </p:custDataLst>
+              </p:nvPr>
+            </p:nvSpPr>
+            <p:spPr>
+              <a:xfrm>
+                <a:off x="5741" y="753"/>
+                <a:ext cx="120" cy="120"/>
+              </a:xfrm>
+              <a:prstGeom prst="rect">
+                <a:avLst/>
+              </a:prstGeom>
+              <a:noFill/>
+              <a:ln>
+                <a:solidFill>
+                  <a:srgbClr val="7F7F7F">
+                    <a:alpha val="70000"/>
+                  </a:srgbClr>
+                </a:solidFill>
+              </a:ln>
+            </p:spPr>
+            <p:style>
+              <a:lnRef idx="2">
+                <a:schemeClr val="accent1">
+                  <a:lumMod val="75000"/>
+                </a:schemeClr>
+              </a:lnRef>
+              <a:fillRef idx="1">
+                <a:schemeClr val="accent1"/>
+              </a:fillRef>
+              <a:effectRef idx="0">
+                <a:srgbClr val="FFFFFF"/>
+              </a:effectRef>
+              <a:fontRef idx="minor">
+                <a:schemeClr val="lt1"/>
+              </a:fontRef>
+            </p:style>
+            <p:txBody>
+              <a:bodyPr rtlCol="0" anchor="ctr"/>
+              <a:p>
+                <a:pPr algn="ctr"/>
+                <a:endParaRPr lang="zh-CN" altLang="en-US"/>
+              </a:p>
+            </p:txBody>
+          </p:sp>
+        </p:grpSp>
+      </p:grpSp>
+      <p:grpSp>
+        <p:nvGrpSpPr>
+          <p:cNvPr id="52" name="组合 51"/>
+          <p:cNvGrpSpPr/>
+          <p:nvPr/>
+        </p:nvGrpSpPr>
+        <p:grpSpPr>
+          <a:xfrm>
+            <a:off x="2630170" y="1517650"/>
+            <a:ext cx="3252470" cy="213360"/>
+            <a:chOff x="4236" y="2499"/>
+            <a:chExt cx="5122" cy="336"/>
+          </a:xfrm>
+        </p:grpSpPr>
+        <p:grpSp>
+          <p:nvGrpSpPr>
+            <p:cNvPr id="51" name="组合 50"/>
+            <p:cNvGrpSpPr/>
+            <p:nvPr/>
+          </p:nvGrpSpPr>
+          <p:grpSpPr>
+            <a:xfrm>
+              <a:off x="4236" y="2499"/>
+              <a:ext cx="5122" cy="336"/>
+              <a:chOff x="4236" y="2499"/>
+              <a:chExt cx="5122" cy="336"/>
+            </a:xfrm>
+          </p:grpSpPr>
+          <p:sp>
+            <p:nvSpPr>
+              <p:cNvPr id="32" name="文本框 31"/>
+              <p:cNvSpPr txBox="1"/>
+              <p:nvPr>
+                <p:custDataLst>
+                  <p:tags r:id="rId11"/>
+                </p:custDataLst>
+              </p:nvPr>
+            </p:nvSpPr>
+            <p:spPr>
+              <a:xfrm>
+                <a:off x="4236" y="2499"/>
+                <a:ext cx="1235" cy="337"/>
+              </a:xfrm>
+              <a:prstGeom prst="rect">
+                <a:avLst/>
+              </a:prstGeom>
+              <a:noFill/>
+            </p:spPr>
+            <p:txBody>
+              <a:bodyPr wrap="square" rtlCol="0">
+                <a:spAutoFit/>
+              </a:bodyPr>
+              <a:p>
+                <a:pPr algn="l"/>
+                <a:r>
+                  <a:rPr lang="zh-CN" altLang="en-US" sz="800">
+                    <a:solidFill>
+                      <a:schemeClr val="bg1">
+                        <a:lumMod val="50000"/>
+                      </a:schemeClr>
+                    </a:solidFill>
+                  </a:rPr>
+                  <a:t>排序</a:t>
+                </a:r>
+                <a:r>
+                  <a:rPr lang="zh-CN" altLang="en-US" sz="800">
+                    <a:solidFill>
+                      <a:schemeClr val="bg1">
+                        <a:lumMod val="50000"/>
+                      </a:schemeClr>
+                    </a:solidFill>
+                  </a:rPr>
+                  <a:t>方式：</a:t>
+                </a:r>
+                <a:endParaRPr lang="zh-CN" altLang="en-US" sz="800">
+                  <a:solidFill>
+                    <a:schemeClr val="bg1">
+                      <a:lumMod val="50000"/>
+                    </a:schemeClr>
+                  </a:solidFill>
+                </a:endParaRPr>
+              </a:p>
+            </p:txBody>
+          </p:sp>
+          <p:grpSp>
+            <p:nvGrpSpPr>
+              <p:cNvPr id="39" name="组合 38"/>
+              <p:cNvGrpSpPr/>
+              <p:nvPr/>
+            </p:nvGrpSpPr>
+            <p:grpSpPr>
+              <a:xfrm>
+                <a:off x="5478" y="2499"/>
+                <a:ext cx="712" cy="337"/>
+                <a:chOff x="5741" y="645"/>
+                <a:chExt cx="712" cy="337"/>
+              </a:xfrm>
+            </p:grpSpPr>
+            <p:sp>
+              <p:nvSpPr>
+                <p:cNvPr id="40" name="文本框 39"/>
+                <p:cNvSpPr txBox="1"/>
+                <p:nvPr>
+                  <p:custDataLst>
+                    <p:tags r:id="rId12"/>
+                  </p:custDataLst>
+                </p:nvPr>
+              </p:nvSpPr>
+              <p:spPr>
+                <a:xfrm>
+                  <a:off x="5811" y="645"/>
+                  <a:ext cx="642" cy="337"/>
+                </a:xfrm>
+                <a:prstGeom prst="rect">
+                  <a:avLst/>
+                </a:prstGeom>
+                <a:noFill/>
+              </p:spPr>
+              <p:txBody>
+                <a:bodyPr wrap="square" rtlCol="0">
+                  <a:spAutoFit/>
+                </a:bodyPr>
+                <a:p>
+                  <a:pPr algn="l"/>
+                  <a:r>
+                    <a:rPr lang="zh-CN" altLang="en-US" sz="800">
+                      <a:solidFill>
+                        <a:schemeClr val="bg1">
+                          <a:lumMod val="50000"/>
+                        </a:schemeClr>
+                      </a:solidFill>
+                    </a:rPr>
+                    <a:t>名称</a:t>
+                  </a:r>
+                  <a:endParaRPr lang="zh-CN" altLang="en-US" sz="800">
+                    <a:solidFill>
+                      <a:schemeClr val="bg1">
+                        <a:lumMod val="50000"/>
+                      </a:schemeClr>
+                    </a:solidFill>
+                  </a:endParaRPr>
+                </a:p>
+              </p:txBody>
+            </p:sp>
+            <p:sp>
+              <p:nvSpPr>
+                <p:cNvPr id="41" name="椭圆 40"/>
+                <p:cNvSpPr/>
+                <p:nvPr>
+                  <p:custDataLst>
+                    <p:tags r:id="rId13"/>
+                  </p:custDataLst>
+                </p:nvPr>
+              </p:nvSpPr>
+              <p:spPr>
+                <a:xfrm>
+                  <a:off x="5741" y="753"/>
+                  <a:ext cx="120" cy="120"/>
+                </a:xfrm>
+                <a:prstGeom prst="ellipse">
+                  <a:avLst/>
+                </a:prstGeom>
+                <a:noFill/>
+                <a:ln>
+                  <a:solidFill>
+                    <a:srgbClr val="7F7F7F">
+                      <a:alpha val="70000"/>
+                    </a:srgbClr>
+                  </a:solidFill>
+                </a:ln>
+              </p:spPr>
+              <p:style>
+                <a:lnRef idx="2">
+                  <a:schemeClr val="accent1">
+                    <a:lumMod val="75000"/>
+                  </a:schemeClr>
+                </a:lnRef>
+                <a:fillRef idx="1">
+                  <a:schemeClr val="accent1"/>
+                </a:fillRef>
+                <a:effectRef idx="0">
+                  <a:srgbClr val="FFFFFF"/>
+                </a:effectRef>
+                <a:fontRef idx="minor">
+                  <a:schemeClr val="lt1"/>
+                </a:fontRef>
+              </p:style>
+              <p:txBody>
+                <a:bodyPr rtlCol="0" anchor="ctr"/>
+                <a:p>
+                  <a:pPr algn="ctr"/>
+                  <a:endParaRPr lang="zh-CN" altLang="en-US"/>
+                </a:p>
+              </p:txBody>
+            </p:sp>
+          </p:grpSp>
+          <p:grpSp>
+            <p:nvGrpSpPr>
+              <p:cNvPr id="42" name="组合 41"/>
+              <p:cNvGrpSpPr/>
+              <p:nvPr/>
+            </p:nvGrpSpPr>
+            <p:grpSpPr>
+              <a:xfrm>
+                <a:off x="6623" y="2499"/>
+                <a:ext cx="1591" cy="337"/>
+                <a:chOff x="5741" y="645"/>
+                <a:chExt cx="1591" cy="337"/>
+              </a:xfrm>
+            </p:grpSpPr>
+            <p:sp>
+              <p:nvSpPr>
+                <p:cNvPr id="43" name="文本框 42"/>
+                <p:cNvSpPr txBox="1"/>
+                <p:nvPr>
+                  <p:custDataLst>
+                    <p:tags r:id="rId14"/>
+                  </p:custDataLst>
+                </p:nvPr>
+              </p:nvSpPr>
+              <p:spPr>
+                <a:xfrm>
+                  <a:off x="5811" y="645"/>
+                  <a:ext cx="1521" cy="337"/>
+                </a:xfrm>
+                <a:prstGeom prst="rect">
+                  <a:avLst/>
+                </a:prstGeom>
+                <a:noFill/>
+              </p:spPr>
+              <p:txBody>
+                <a:bodyPr wrap="square" rtlCol="0">
+                  <a:spAutoFit/>
+                </a:bodyPr>
+                <a:p>
+                  <a:pPr algn="l"/>
+                  <a:r>
+                    <a:rPr lang="zh-CN" altLang="en-US" sz="800">
+                      <a:solidFill>
+                        <a:schemeClr val="bg1">
+                          <a:lumMod val="50000"/>
+                        </a:schemeClr>
+                      </a:solidFill>
+                    </a:rPr>
+                    <a:t>创建日期</a:t>
+                  </a:r>
+                  <a:endParaRPr lang="zh-CN" altLang="en-US" sz="800">
+                    <a:solidFill>
+                      <a:schemeClr val="bg1">
+                        <a:lumMod val="50000"/>
+                      </a:schemeClr>
+                    </a:solidFill>
+                  </a:endParaRPr>
+                </a:p>
+              </p:txBody>
+            </p:sp>
+            <p:sp>
+              <p:nvSpPr>
+                <p:cNvPr id="44" name="椭圆 43"/>
+                <p:cNvSpPr/>
+                <p:nvPr>
+                  <p:custDataLst>
+                    <p:tags r:id="rId15"/>
+                  </p:custDataLst>
+                </p:nvPr>
+              </p:nvSpPr>
+              <p:spPr>
+                <a:xfrm>
+                  <a:off x="5741" y="753"/>
+                  <a:ext cx="120" cy="120"/>
+                </a:xfrm>
+                <a:prstGeom prst="ellipse">
+                  <a:avLst/>
+                </a:prstGeom>
+                <a:noFill/>
+                <a:ln>
+                  <a:solidFill>
+                    <a:srgbClr val="7F7F7F">
+                      <a:alpha val="70000"/>
+                    </a:srgbClr>
+                  </a:solidFill>
+                </a:ln>
+              </p:spPr>
+              <p:style>
+                <a:lnRef idx="2">
+                  <a:schemeClr val="accent1">
+                    <a:lumMod val="75000"/>
+                  </a:schemeClr>
+                </a:lnRef>
+                <a:fillRef idx="1">
+                  <a:schemeClr val="accent1"/>
+                </a:fillRef>
+                <a:effectRef idx="0">
+                  <a:srgbClr val="FFFFFF"/>
+                </a:effectRef>
+                <a:fontRef idx="minor">
+                  <a:schemeClr val="lt1"/>
+                </a:fontRef>
+              </p:style>
+              <p:txBody>
+                <a:bodyPr rtlCol="0" anchor="ctr"/>
+                <a:p>
+                  <a:pPr algn="ctr"/>
+                  <a:endParaRPr lang="zh-CN" altLang="en-US"/>
+                </a:p>
+              </p:txBody>
+            </p:sp>
+          </p:grpSp>
+          <p:sp>
+            <p:nvSpPr>
+              <p:cNvPr id="45" name="文本框 44"/>
+              <p:cNvSpPr txBox="1"/>
+              <p:nvPr>
+                <p:custDataLst>
+                  <p:tags r:id="rId16"/>
+                </p:custDataLst>
+              </p:nvPr>
+            </p:nvSpPr>
+            <p:spPr>
+              <a:xfrm>
+                <a:off x="7838" y="2499"/>
+                <a:ext cx="1521" cy="337"/>
+              </a:xfrm>
+              <a:prstGeom prst="rect">
+                <a:avLst/>
+              </a:prstGeom>
+              <a:noFill/>
+            </p:spPr>
+            <p:txBody>
+              <a:bodyPr wrap="square" rtlCol="0">
+                <a:spAutoFit/>
+              </a:bodyPr>
+              <a:p>
+                <a:pPr algn="l"/>
+                <a:r>
+                  <a:rPr lang="zh-CN" altLang="en-US" sz="800">
+                    <a:solidFill>
+                      <a:schemeClr val="bg1">
+                        <a:lumMod val="50000"/>
+                      </a:schemeClr>
+                    </a:solidFill>
+                  </a:rPr>
+                  <a:t>修改</a:t>
+                </a:r>
+                <a:r>
+                  <a:rPr lang="zh-CN" altLang="en-US" sz="800">
+                    <a:solidFill>
+                      <a:schemeClr val="bg1">
+                        <a:lumMod val="50000"/>
+                      </a:schemeClr>
+                    </a:solidFill>
+                  </a:rPr>
+                  <a:t>日期</a:t>
+                </a:r>
+                <a:endParaRPr lang="zh-CN" altLang="en-US" sz="800">
+                  <a:solidFill>
+                    <a:schemeClr val="bg1">
+                      <a:lumMod val="50000"/>
+                    </a:schemeClr>
+                  </a:solidFill>
+                </a:endParaRPr>
+              </a:p>
+            </p:txBody>
+          </p:sp>
+        </p:grpSp>
+        <p:sp>
+          <p:nvSpPr>
+            <p:cNvPr id="46" name="椭圆 45"/>
+            <p:cNvSpPr/>
+            <p:nvPr>
+              <p:custDataLst>
+                <p:tags r:id="rId17"/>
+              </p:custDataLst>
+            </p:nvPr>
+          </p:nvSpPr>
+          <p:spPr>
+            <a:xfrm>
+              <a:off x="7768" y="2592"/>
+              <a:ext cx="120" cy="120"/>
+            </a:xfrm>
+            <a:prstGeom prst="ellipse">
+              <a:avLst/>
+            </a:prstGeom>
+            <a:noFill/>
+            <a:ln>
+              <a:solidFill>
+                <a:srgbClr val="7F7F7F">
+                  <a:alpha val="70000"/>
+                </a:srgbClr>
+              </a:solidFill>
+            </a:ln>
+          </p:spPr>
+          <p:style>
+            <a:lnRef idx="2">
+              <a:schemeClr val="accent1">
+                <a:lumMod val="75000"/>
+              </a:schemeClr>
+            </a:lnRef>
+            <a:fillRef idx="1">
+              <a:schemeClr val="accent1"/>
+            </a:fillRef>
+            <a:effectRef idx="0">
+              <a:srgbClr val="FFFFFF"/>
+            </a:effectRef>
+            <a:fontRef idx="minor">
+              <a:schemeClr val="lt1"/>
+            </a:fontRef>
+          </p:style>
+          <p:txBody>
+            <a:bodyPr rtlCol="0" anchor="ctr"/>
+            <a:p>
+              <a:pPr algn="ctr"/>
+              <a:endParaRPr lang="zh-CN" altLang="en-US"/>
+            </a:p>
+          </p:txBody>
+        </p:sp>
+      </p:grpSp>
+      <p:sp>
+        <p:nvSpPr>
+          <p:cNvPr id="2" name="矩形 1"/>
+          <p:cNvSpPr/>
+          <p:nvPr/>
+        </p:nvSpPr>
+        <p:spPr>
+          <a:xfrm>
+            <a:off x="1428750" y="746125"/>
+            <a:ext cx="1022985" cy="4965700"/>
+          </a:xfrm>
+          <a:prstGeom prst="rect">
+            <a:avLst/>
+          </a:prstGeom>
+          <a:solidFill>
+            <a:srgbClr val="7073DE"/>
+          </a:solidFill>
+          <a:ln>
+            <a:noFill/>
+          </a:ln>
+          <a:effectLst>
+            <a:outerShdw blurRad="38100" sx="101000" sy="101000" algn="ctr" rotWithShape="0">
+              <a:prstClr val="black">
+                <a:alpha val="40000"/>
+              </a:prstClr>
+            </a:outerShdw>
+          </a:effectLst>
+        </p:spPr>
+        <p:style>
+          <a:lnRef idx="2">
+            <a:schemeClr val="accent1">
+              <a:lumMod val="75000"/>
+            </a:schemeClr>
+          </a:lnRef>
+          <a:fillRef idx="1">
+            <a:schemeClr val="accent1"/>
+          </a:fillRef>
+          <a:effectRef idx="0">
+            <a:srgbClr val="FFFFFF"/>
+          </a:effectRef>
+          <a:fontRef idx="minor">
+            <a:schemeClr val="lt1"/>
+          </a:fontRef>
+        </p:style>
+        <p:txBody>
+          <a:bodyPr rtlCol="0" anchor="ctr"/>
+          <a:p>
+            <a:pPr algn="ctr"/>
+            <a:endParaRPr lang="zh-CN" altLang="en-US"/>
+          </a:p>
+        </p:txBody>
+      </p:sp>
+      <p:sp>
+        <p:nvSpPr>
+          <p:cNvPr id="20" name="文本框 19"/>
+          <p:cNvSpPr txBox="1"/>
+          <p:nvPr/>
+        </p:nvSpPr>
+        <p:spPr>
+          <a:xfrm>
+            <a:off x="1428750" y="742950"/>
+            <a:ext cx="1022985" cy="368300"/>
+          </a:xfrm>
+          <a:prstGeom prst="rect">
+            <a:avLst/>
+          </a:prstGeom>
+          <a:noFill/>
+        </p:spPr>
+        <p:txBody>
+          <a:bodyPr wrap="square" rtlCol="0">
+            <a:spAutoFit/>
+          </a:bodyPr>
+          <a:p>
+            <a:pPr algn="ctr"/>
+            <a:r>
+              <a:rPr lang="en-US" altLang="zh-CN" b="1">
+                <a:solidFill>
+                  <a:schemeClr val="bg2"/>
+                </a:solidFill>
+                <a:latin typeface="+mj-ea"/>
+                <a:ea typeface="+mj-ea"/>
+              </a:rPr>
+              <a:t>EchoX</a:t>
+            </a:r>
+            <a:endParaRPr lang="en-US" altLang="zh-CN" b="1">
+              <a:solidFill>
+                <a:schemeClr val="bg2"/>
+              </a:solidFill>
+              <a:latin typeface="+mj-ea"/>
+              <a:ea typeface="+mj-ea"/>
+            </a:endParaRPr>
+          </a:p>
+        </p:txBody>
+      </p:sp>
+      <p:grpSp>
+        <p:nvGrpSpPr>
+          <p:cNvPr id="5" name="组合 4"/>
+          <p:cNvGrpSpPr/>
+          <p:nvPr/>
+        </p:nvGrpSpPr>
+        <p:grpSpPr>
+          <a:xfrm>
+            <a:off x="1428750" y="1155065"/>
+            <a:ext cx="1022985" cy="349250"/>
+            <a:chOff x="3905" y="442"/>
+            <a:chExt cx="1611" cy="550"/>
+          </a:xfrm>
+        </p:grpSpPr>
+        <p:sp>
+          <p:nvSpPr>
+            <p:cNvPr id="3" name="矩形 2"/>
+            <p:cNvSpPr/>
+            <p:nvPr/>
+          </p:nvSpPr>
+          <p:spPr>
+            <a:xfrm>
+              <a:off x="3905" y="442"/>
+              <a:ext cx="1610" cy="550"/>
+            </a:xfrm>
+            <a:prstGeom prst="rect">
+              <a:avLst/>
+            </a:prstGeom>
+            <a:solidFill>
+              <a:srgbClr val="6568CC"/>
+            </a:solidFill>
+            <a:ln>
+              <a:noFill/>
+            </a:ln>
+            <a:effectLst>
+              <a:innerShdw blurRad="190500">
+                <a:prstClr val="black">
+                  <a:alpha val="11000"/>
+                </a:prstClr>
+              </a:innerShdw>
+            </a:effectLst>
+          </p:spPr>
+          <p:style>
+            <a:lnRef idx="2">
+              <a:schemeClr val="accent1">
+                <a:lumMod val="75000"/>
+              </a:schemeClr>
+            </a:lnRef>
+            <a:fillRef idx="1">
+              <a:schemeClr val="accent1"/>
+            </a:fillRef>
+            <a:effectRef idx="0">
+              <a:srgbClr val="FFFFFF"/>
+            </a:effectRef>
+            <a:fontRef idx="minor">
+              <a:schemeClr val="lt1"/>
+            </a:fontRef>
+          </p:style>
+          <p:txBody>
+            <a:bodyPr rtlCol="0" anchor="ctr"/>
+            <a:p>
+              <a:pPr algn="ctr"/>
+              <a:endParaRPr lang="zh-CN" altLang="en-US"/>
+            </a:p>
+          </p:txBody>
+        </p:sp>
+        <p:sp>
+          <p:nvSpPr>
+            <p:cNvPr id="4" name="矩形 3"/>
+            <p:cNvSpPr/>
+            <p:nvPr>
+              <p:custDataLst>
+                <p:tags r:id="rId18"/>
+              </p:custDataLst>
+            </p:nvPr>
+          </p:nvSpPr>
+          <p:spPr>
+            <a:xfrm>
+              <a:off x="5471" y="443"/>
+              <a:ext cx="45" cy="549"/>
+            </a:xfrm>
+            <a:prstGeom prst="rect">
+              <a:avLst/>
+            </a:prstGeom>
+            <a:solidFill>
+              <a:schemeClr val="bg1"/>
+            </a:solidFill>
+            <a:ln>
+              <a:noFill/>
+            </a:ln>
+          </p:spPr>
+          <p:style>
+            <a:lnRef idx="2">
+              <a:schemeClr val="accent1">
+                <a:lumMod val="75000"/>
+              </a:schemeClr>
+            </a:lnRef>
+            <a:fillRef idx="1">
+              <a:schemeClr val="accent1"/>
+            </a:fillRef>
+            <a:effectRef idx="0">
+              <a:srgbClr val="FFFFFF"/>
+            </a:effectRef>
+            <a:fontRef idx="minor">
+              <a:schemeClr val="lt1"/>
+            </a:fontRef>
+          </p:style>
+          <p:txBody>
+            <a:bodyPr rtlCol="0" anchor="ctr"/>
+            <a:p>
+              <a:pPr algn="ctr"/>
+              <a:endParaRPr lang="zh-CN" altLang="en-US"/>
+            </a:p>
+          </p:txBody>
+        </p:sp>
+      </p:grpSp>
+      <p:grpSp>
+        <p:nvGrpSpPr>
+          <p:cNvPr id="18" name="组合 17"/>
+          <p:cNvGrpSpPr/>
+          <p:nvPr/>
+        </p:nvGrpSpPr>
+        <p:grpSpPr>
+          <a:xfrm>
+            <a:off x="1555750" y="1626235"/>
+            <a:ext cx="808990" cy="213995"/>
+            <a:chOff x="2496" y="2119"/>
+            <a:chExt cx="1274" cy="337"/>
+          </a:xfrm>
+        </p:grpSpPr>
+        <p:sp>
+          <p:nvSpPr>
+            <p:cNvPr id="15" name="文本框 14"/>
+            <p:cNvSpPr txBox="1"/>
+            <p:nvPr>
+              <p:custDataLst>
+                <p:tags r:id="rId19"/>
+              </p:custDataLst>
+            </p:nvPr>
+          </p:nvSpPr>
+          <p:spPr>
+            <a:xfrm>
+              <a:off x="2638" y="2119"/>
+              <a:ext cx="1132" cy="337"/>
+            </a:xfrm>
+            <a:prstGeom prst="rect">
+              <a:avLst/>
+            </a:prstGeom>
+            <a:noFill/>
+          </p:spPr>
+          <p:txBody>
+            <a:bodyPr wrap="square" rtlCol="0">
+              <a:spAutoFit/>
+            </a:bodyPr>
+            <a:p>
+              <a:pPr algn="ctr"/>
+              <a:r>
+                <a:rPr lang="zh-CN" altLang="en-US" sz="800">
+                  <a:solidFill>
+                    <a:schemeClr val="bg1"/>
+                  </a:solidFill>
+                </a:rPr>
+                <a:t>插件</a:t>
+              </a:r>
+              <a:endParaRPr lang="zh-CN" altLang="en-US" sz="1000">
+                <a:solidFill>
+                  <a:schemeClr val="bg1"/>
+                </a:solidFill>
+              </a:endParaRPr>
+            </a:p>
+          </p:txBody>
+        </p:sp>
+        <p:pic>
+          <p:nvPicPr>
+            <p:cNvPr id="16" name="图片 15" descr="插件功能"/>
+            <p:cNvPicPr>
+              <a:picLocks noChangeAspect="1"/>
+            </p:cNvPicPr>
+            <p:nvPr/>
+          </p:nvPicPr>
+          <p:blipFill>
+            <a:blip r:embed="rId20"/>
+            <a:stretch>
+              <a:fillRect/>
+            </a:stretch>
+          </p:blipFill>
+          <p:spPr>
+            <a:xfrm>
+              <a:off x="2496" y="2146"/>
+              <a:ext cx="283" cy="283"/>
+            </a:xfrm>
+            <a:prstGeom prst="rect">
+              <a:avLst/>
+            </a:prstGeom>
+          </p:spPr>
+        </p:pic>
+      </p:grpSp>
+      <p:grpSp>
+        <p:nvGrpSpPr>
+          <p:cNvPr id="17" name="组合 16"/>
+          <p:cNvGrpSpPr/>
+          <p:nvPr/>
+        </p:nvGrpSpPr>
+        <p:grpSpPr>
+          <a:xfrm>
+            <a:off x="1555750" y="1233170"/>
+            <a:ext cx="808990" cy="213995"/>
+            <a:chOff x="2496" y="1476"/>
+            <a:chExt cx="1274" cy="337"/>
+          </a:xfrm>
+        </p:grpSpPr>
+        <p:pic>
+          <p:nvPicPr>
+            <p:cNvPr id="9" name="图片 8" descr="projects "/>
+            <p:cNvPicPr>
+              <a:picLocks noChangeAspect="1"/>
+            </p:cNvPicPr>
+            <p:nvPr/>
+          </p:nvPicPr>
+          <p:blipFill>
+            <a:blip r:embed="rId21"/>
+            <a:stretch>
+              <a:fillRect/>
+            </a:stretch>
+          </p:blipFill>
+          <p:spPr>
+            <a:xfrm>
+              <a:off x="2496" y="1503"/>
+              <a:ext cx="283" cy="283"/>
+            </a:xfrm>
+            <a:prstGeom prst="rect">
+              <a:avLst/>
+            </a:prstGeom>
+          </p:spPr>
+        </p:pic>
+        <p:sp>
+          <p:nvSpPr>
+            <p:cNvPr id="10" name="文本框 9"/>
+            <p:cNvSpPr txBox="1"/>
+            <p:nvPr/>
+          </p:nvSpPr>
+          <p:spPr>
+            <a:xfrm>
+              <a:off x="2638" y="1476"/>
+              <a:ext cx="1132" cy="337"/>
+            </a:xfrm>
+            <a:prstGeom prst="rect">
+              <a:avLst/>
+            </a:prstGeom>
+            <a:noFill/>
+          </p:spPr>
+          <p:txBody>
+            <a:bodyPr wrap="square" rtlCol="0" anchor="ctr" anchorCtr="0">
+              <a:spAutoFit/>
+            </a:bodyPr>
+            <a:p>
+              <a:pPr algn="ctr"/>
+              <a:r>
+                <a:rPr lang="zh-CN" altLang="en-US" sz="800">
+                  <a:solidFill>
+                    <a:schemeClr val="bg1"/>
+                  </a:solidFill>
+                </a:rPr>
+                <a:t>工程</a:t>
+              </a:r>
+              <a:endParaRPr lang="zh-CN" altLang="en-US" sz="800">
+                <a:solidFill>
+                  <a:schemeClr val="bg1"/>
+                </a:solidFill>
+              </a:endParaRPr>
+            </a:p>
+          </p:txBody>
+        </p:sp>
+      </p:grpSp>
+      <p:grpSp>
+        <p:nvGrpSpPr>
+          <p:cNvPr id="19" name="组合 18"/>
+          <p:cNvGrpSpPr/>
+          <p:nvPr/>
+        </p:nvGrpSpPr>
+        <p:grpSpPr>
+          <a:xfrm>
+            <a:off x="1555750" y="1991360"/>
+            <a:ext cx="808990" cy="213995"/>
+            <a:chOff x="2496" y="2667"/>
+            <a:chExt cx="1274" cy="337"/>
+          </a:xfrm>
+        </p:grpSpPr>
+        <p:pic>
+          <p:nvPicPr>
+            <p:cNvPr id="11" name="图片 10" descr="setting-fill"/>
+            <p:cNvPicPr>
+              <a:picLocks noChangeAspect="1"/>
+            </p:cNvPicPr>
+            <p:nvPr/>
+          </p:nvPicPr>
+          <p:blipFill>
+            <a:blip r:embed="rId22"/>
+            <a:stretch>
+              <a:fillRect/>
+            </a:stretch>
+          </p:blipFill>
+          <p:spPr>
+            <a:xfrm>
+              <a:off x="2496" y="2694"/>
+              <a:ext cx="283" cy="283"/>
+            </a:xfrm>
+            <a:prstGeom prst="rect">
+              <a:avLst/>
+            </a:prstGeom>
+          </p:spPr>
+        </p:pic>
+        <p:sp>
+          <p:nvSpPr>
+            <p:cNvPr id="14" name="文本框 13"/>
+            <p:cNvSpPr txBox="1"/>
+            <p:nvPr>
+              <p:custDataLst>
+                <p:tags r:id="rId23"/>
+              </p:custDataLst>
+            </p:nvPr>
+          </p:nvSpPr>
+          <p:spPr>
+            <a:xfrm>
+              <a:off x="2638" y="2667"/>
+              <a:ext cx="1132" cy="337"/>
+            </a:xfrm>
+            <a:prstGeom prst="rect">
+              <a:avLst/>
+            </a:prstGeom>
+            <a:noFill/>
+          </p:spPr>
+          <p:txBody>
+            <a:bodyPr wrap="square" rtlCol="0">
+              <a:spAutoFit/>
+            </a:bodyPr>
+            <a:p>
+              <a:pPr algn="ctr"/>
+              <a:r>
+                <a:rPr lang="zh-CN" altLang="en-US" sz="800">
+                  <a:solidFill>
+                    <a:schemeClr val="bg1"/>
+                  </a:solidFill>
+                </a:rPr>
+                <a:t>设置</a:t>
+              </a:r>
+              <a:endParaRPr lang="zh-CN" altLang="en-US" sz="1000">
+                <a:solidFill>
+                  <a:schemeClr val="bg1"/>
+                </a:solidFill>
+              </a:endParaRPr>
+            </a:p>
+          </p:txBody>
+        </p:sp>
+      </p:grpSp>
+      <p:sp>
+        <p:nvSpPr>
+          <p:cNvPr id="54" name="圆角矩形 53"/>
+          <p:cNvSpPr/>
+          <p:nvPr/>
+        </p:nvSpPr>
+        <p:spPr>
+          <a:xfrm>
+            <a:off x="7508240" y="1358900"/>
+            <a:ext cx="855980" cy="372745"/>
+          </a:xfrm>
+          <a:prstGeom prst="roundRect">
+            <a:avLst>
+              <a:gd name="adj" fmla="val 4642"/>
+            </a:avLst>
+          </a:prstGeom>
+          <a:solidFill>
+            <a:srgbClr val="6568CC"/>
+          </a:solidFill>
+          <a:ln>
+            <a:solidFill>
+              <a:schemeClr val="bg1">
+                <a:alpha val="25000"/>
+              </a:schemeClr>
+            </a:solidFill>
+          </a:ln>
+          <a:effectLst>
+            <a:outerShdw blurRad="139700" algn="ctr" rotWithShape="0">
+              <a:prstClr val="black">
+                <a:alpha val="9000"/>
+              </a:prstClr>
+            </a:outerShdw>
+          </a:effectLst>
+        </p:spPr>
+        <p:style>
+          <a:lnRef idx="2">
+            <a:schemeClr val="accent1">
+              <a:lumMod val="75000"/>
+            </a:schemeClr>
+          </a:lnRef>
+          <a:fillRef idx="1">
+            <a:schemeClr val="accent1"/>
+          </a:fillRef>
+          <a:effectRef idx="0">
+            <a:srgbClr val="FFFFFF"/>
+          </a:effectRef>
+          <a:fontRef idx="minor">
+            <a:schemeClr val="lt1"/>
+          </a:fontRef>
+        </p:style>
+        <p:txBody>
+          <a:bodyPr rtlCol="0" anchor="ctr" anchorCtr="0"/>
+          <a:p>
+            <a:pPr algn="ctr"/>
+            <a:r>
+              <a:rPr lang="en-US" altLang="zh-CN" sz="2800">
+                <a:solidFill>
+                  <a:schemeClr val="bg1"/>
+                </a:solidFill>
+              </a:rPr>
+              <a:t>+</a:t>
+            </a:r>
+            <a:endParaRPr lang="en-US" altLang="zh-CN" sz="2800">
+              <a:solidFill>
+                <a:schemeClr val="bg1"/>
+              </a:solidFill>
+            </a:endParaRPr>
+          </a:p>
+        </p:txBody>
+      </p:sp>
+      <p:sp>
+        <p:nvSpPr>
+          <p:cNvPr id="60" name="圆角矩形 59"/>
+          <p:cNvSpPr/>
+          <p:nvPr>
+            <p:custDataLst>
+              <p:tags r:id="rId24"/>
+            </p:custDataLst>
+          </p:nvPr>
+        </p:nvSpPr>
+        <p:spPr>
+          <a:xfrm>
+            <a:off x="8300720" y="1909445"/>
+            <a:ext cx="93980" cy="1313180"/>
+          </a:xfrm>
+          <a:prstGeom prst="roundRect">
+            <a:avLst>
+              <a:gd name="adj" fmla="val 29729"/>
+            </a:avLst>
+          </a:prstGeom>
+          <a:solidFill>
+            <a:srgbClr val="7073DE">
+              <a:alpha val="40000"/>
+            </a:srgbClr>
+          </a:solidFill>
+          <a:ln>
+            <a:noFill/>
+          </a:ln>
+          <a:effectLst/>
+        </p:spPr>
+        <p:style>
+          <a:lnRef idx="2">
+            <a:schemeClr val="accent1">
+              <a:lumMod val="75000"/>
+            </a:schemeClr>
+          </a:lnRef>
+          <a:fillRef idx="1">
+            <a:schemeClr val="accent1"/>
+          </a:fillRef>
+          <a:effectRef idx="0">
+            <a:srgbClr val="FFFFFF"/>
+          </a:effectRef>
+          <a:fontRef idx="minor">
+            <a:schemeClr val="lt1"/>
+          </a:fontRef>
+        </p:style>
+        <p:txBody>
+          <a:bodyPr rtlCol="0" anchor="ctr"/>
+          <a:p>
+            <a:pPr algn="ctr"/>
+            <a:endParaRPr lang="zh-CN" altLang="en-US"/>
+          </a:p>
+        </p:txBody>
+      </p:sp>
+      <p:sp>
+        <p:nvSpPr>
+          <p:cNvPr id="63" name="圆角矩形 62"/>
+          <p:cNvSpPr/>
+          <p:nvPr>
+            <p:custDataLst>
+              <p:tags r:id="rId25"/>
+            </p:custDataLst>
+          </p:nvPr>
+        </p:nvSpPr>
+        <p:spPr>
+          <a:xfrm>
+            <a:off x="4011930" y="2047875"/>
+            <a:ext cx="1332865" cy="1313180"/>
+          </a:xfrm>
+          <a:prstGeom prst="roundRect">
+            <a:avLst>
+              <a:gd name="adj" fmla="val 4642"/>
+            </a:avLst>
+          </a:prstGeom>
+          <a:solidFill>
+            <a:schemeClr val="bg1"/>
+          </a:solidFill>
+          <a:ln>
+            <a:noFill/>
+          </a:ln>
+          <a:effectLst>
+            <a:outerShdw blurRad="127000" algn="ctr" rotWithShape="0">
+              <a:prstClr val="black">
+                <a:alpha val="5000"/>
+              </a:prstClr>
+            </a:outerShdw>
+          </a:effectLst>
+        </p:spPr>
+        <p:style>
+          <a:lnRef idx="2">
+            <a:schemeClr val="accent1">
+              <a:lumMod val="75000"/>
+            </a:schemeClr>
+          </a:lnRef>
+          <a:fillRef idx="1">
+            <a:schemeClr val="accent1"/>
+          </a:fillRef>
+          <a:effectRef idx="0">
+            <a:srgbClr val="FFFFFF"/>
+          </a:effectRef>
+          <a:fontRef idx="minor">
+            <a:schemeClr val="lt1"/>
+          </a:fontRef>
+        </p:style>
+        <p:txBody>
+          <a:bodyPr rtlCol="0" anchor="ctr"/>
+          <a:p>
+            <a:pPr algn="ctr"/>
+            <a:endParaRPr lang="zh-CN" altLang="en-US"/>
+          </a:p>
+        </p:txBody>
+      </p:sp>
+      <p:sp>
+        <p:nvSpPr>
+          <p:cNvPr id="64" name="文本框 63"/>
+          <p:cNvSpPr txBox="1"/>
+          <p:nvPr>
+            <p:custDataLst>
+              <p:tags r:id="rId26"/>
+            </p:custDataLst>
+          </p:nvPr>
+        </p:nvSpPr>
+        <p:spPr>
+          <a:xfrm>
+            <a:off x="4011930" y="3430270"/>
+            <a:ext cx="1332865" cy="224155"/>
+          </a:xfrm>
+          <a:prstGeom prst="rect">
+            <a:avLst/>
+          </a:prstGeom>
+          <a:noFill/>
+        </p:spPr>
+        <p:txBody>
+          <a:bodyPr wrap="square" rtlCol="0">
+            <a:noAutofit/>
+          </a:bodyPr>
+          <a:p>
+            <a:pPr algn="ctr"/>
+            <a:r>
+              <a:rPr lang="zh-CN" altLang="en-US" sz="800">
+                <a:solidFill>
+                  <a:schemeClr val="bg1">
+                    <a:lumMod val="50000"/>
+                  </a:schemeClr>
+                </a:solidFill>
+              </a:rPr>
+              <a:t>工程</a:t>
+            </a:r>
+            <a:r>
+              <a:rPr lang="en-US" altLang="zh-CN" sz="800">
+                <a:solidFill>
+                  <a:schemeClr val="bg1">
+                    <a:lumMod val="50000"/>
+                  </a:schemeClr>
+                </a:solidFill>
+              </a:rPr>
+              <a:t>1</a:t>
+            </a:r>
+            <a:endParaRPr lang="en-US" altLang="zh-CN" sz="800">
+              <a:solidFill>
+                <a:schemeClr val="bg1">
+                  <a:lumMod val="50000"/>
+                </a:schemeClr>
+              </a:solidFill>
+            </a:endParaRPr>
+          </a:p>
+        </p:txBody>
+      </p:sp>
+      <p:sp>
+        <p:nvSpPr>
+          <p:cNvPr id="66" name="圆角矩形 65"/>
+          <p:cNvSpPr/>
+          <p:nvPr>
+            <p:custDataLst>
+              <p:tags r:id="rId27"/>
+            </p:custDataLst>
+          </p:nvPr>
+        </p:nvSpPr>
+        <p:spPr>
+          <a:xfrm>
+            <a:off x="5429250" y="2047875"/>
+            <a:ext cx="1332865" cy="1313180"/>
+          </a:xfrm>
+          <a:prstGeom prst="roundRect">
+            <a:avLst>
+              <a:gd name="adj" fmla="val 4642"/>
+            </a:avLst>
+          </a:prstGeom>
+          <a:solidFill>
+            <a:schemeClr val="bg1"/>
+          </a:solidFill>
+          <a:ln>
+            <a:noFill/>
+          </a:ln>
+          <a:effectLst>
+            <a:outerShdw blurRad="127000" algn="ctr" rotWithShape="0">
+              <a:schemeClr val="tx1">
+                <a:alpha val="5000"/>
+              </a:schemeClr>
+            </a:outerShdw>
+          </a:effectLst>
+        </p:spPr>
+        <p:style>
+          <a:lnRef idx="2">
+            <a:schemeClr val="accent1">
+              <a:lumMod val="75000"/>
+            </a:schemeClr>
+          </a:lnRef>
+          <a:fillRef idx="1">
+            <a:schemeClr val="accent1"/>
+          </a:fillRef>
+          <a:effectRef idx="0">
+            <a:srgbClr val="FFFFFF"/>
+          </a:effectRef>
+          <a:fontRef idx="minor">
+            <a:schemeClr val="lt1"/>
+          </a:fontRef>
+        </p:style>
+        <p:txBody>
+          <a:bodyPr rtlCol="0" anchor="ctr"/>
+          <a:p>
+            <a:pPr algn="ctr"/>
+            <a:endParaRPr lang="zh-CN" altLang="en-US"/>
+          </a:p>
+        </p:txBody>
+      </p:sp>
+      <p:sp>
+        <p:nvSpPr>
+          <p:cNvPr id="67" name="文本框 66"/>
+          <p:cNvSpPr txBox="1"/>
+          <p:nvPr>
+            <p:custDataLst>
+              <p:tags r:id="rId28"/>
+            </p:custDataLst>
+          </p:nvPr>
+        </p:nvSpPr>
+        <p:spPr>
+          <a:xfrm>
+            <a:off x="5429250" y="3430270"/>
+            <a:ext cx="1332865" cy="224155"/>
+          </a:xfrm>
+          <a:prstGeom prst="rect">
+            <a:avLst/>
+          </a:prstGeom>
+          <a:noFill/>
+        </p:spPr>
+        <p:txBody>
+          <a:bodyPr wrap="square" rtlCol="0">
+            <a:noAutofit/>
+          </a:bodyPr>
+          <a:p>
+            <a:pPr algn="ctr"/>
+            <a:r>
+              <a:rPr lang="zh-CN" altLang="en-US" sz="800">
+                <a:solidFill>
+                  <a:schemeClr val="bg1">
+                    <a:lumMod val="50000"/>
+                  </a:schemeClr>
+                </a:solidFill>
+              </a:rPr>
+              <a:t>工程</a:t>
+            </a:r>
+            <a:r>
+              <a:rPr lang="en-US" altLang="zh-CN" sz="800">
+                <a:solidFill>
+                  <a:schemeClr val="bg1">
+                    <a:lumMod val="50000"/>
+                  </a:schemeClr>
+                </a:solidFill>
+              </a:rPr>
+              <a:t>1</a:t>
+            </a:r>
+            <a:endParaRPr lang="en-US" altLang="zh-CN" sz="800">
+              <a:solidFill>
+                <a:schemeClr val="bg1">
+                  <a:lumMod val="50000"/>
+                </a:schemeClr>
+              </a:solidFill>
+            </a:endParaRPr>
+          </a:p>
+        </p:txBody>
+      </p:sp>
+      <p:sp>
+        <p:nvSpPr>
+          <p:cNvPr id="69" name="圆角矩形 68"/>
+          <p:cNvSpPr/>
+          <p:nvPr>
+            <p:custDataLst>
+              <p:tags r:id="rId29"/>
+            </p:custDataLst>
+          </p:nvPr>
+        </p:nvSpPr>
+        <p:spPr>
+          <a:xfrm>
+            <a:off x="6846570" y="2047875"/>
+            <a:ext cx="1332865" cy="1313180"/>
+          </a:xfrm>
+          <a:prstGeom prst="roundRect">
+            <a:avLst>
+              <a:gd name="adj" fmla="val 4642"/>
+            </a:avLst>
+          </a:prstGeom>
+          <a:solidFill>
+            <a:schemeClr val="bg1"/>
+          </a:solidFill>
+          <a:ln>
+            <a:noFill/>
+          </a:ln>
+          <a:effectLst>
+            <a:outerShdw blurRad="127000" algn="ctr" rotWithShape="0">
+              <a:schemeClr val="tx1">
+                <a:alpha val="5000"/>
+              </a:schemeClr>
+            </a:outerShdw>
+          </a:effectLst>
+        </p:spPr>
+        <p:style>
+          <a:lnRef idx="2">
+            <a:schemeClr val="accent1">
+              <a:lumMod val="75000"/>
+            </a:schemeClr>
+          </a:lnRef>
+          <a:fillRef idx="1">
+            <a:schemeClr val="accent1"/>
+          </a:fillRef>
+          <a:effectRef idx="0">
+            <a:srgbClr val="FFFFFF"/>
+          </a:effectRef>
+          <a:fontRef idx="minor">
+            <a:schemeClr val="lt1"/>
+          </a:fontRef>
+        </p:style>
+        <p:txBody>
+          <a:bodyPr rtlCol="0" anchor="ctr"/>
+          <a:p>
+            <a:pPr algn="ctr"/>
+            <a:endParaRPr lang="zh-CN" altLang="en-US"/>
+          </a:p>
+        </p:txBody>
+      </p:sp>
+      <p:sp>
+        <p:nvSpPr>
+          <p:cNvPr id="70" name="文本框 69"/>
+          <p:cNvSpPr txBox="1"/>
+          <p:nvPr>
+            <p:custDataLst>
+              <p:tags r:id="rId30"/>
+            </p:custDataLst>
+          </p:nvPr>
+        </p:nvSpPr>
+        <p:spPr>
+          <a:xfrm>
+            <a:off x="6846570" y="3430270"/>
+            <a:ext cx="1332865" cy="224155"/>
+          </a:xfrm>
+          <a:prstGeom prst="rect">
+            <a:avLst/>
+          </a:prstGeom>
+          <a:noFill/>
+        </p:spPr>
+        <p:txBody>
+          <a:bodyPr wrap="square" rtlCol="0">
+            <a:noAutofit/>
+          </a:bodyPr>
+          <a:p>
+            <a:pPr algn="ctr"/>
+            <a:r>
+              <a:rPr lang="zh-CN" altLang="en-US" sz="800">
+                <a:solidFill>
+                  <a:schemeClr val="bg1">
+                    <a:lumMod val="50000"/>
+                  </a:schemeClr>
+                </a:solidFill>
+              </a:rPr>
+              <a:t>工程</a:t>
+            </a:r>
+            <a:r>
+              <a:rPr lang="en-US" altLang="zh-CN" sz="800">
+                <a:solidFill>
+                  <a:schemeClr val="bg1">
+                    <a:lumMod val="50000"/>
+                  </a:schemeClr>
+                </a:solidFill>
+              </a:rPr>
+              <a:t>1</a:t>
+            </a:r>
+            <a:endParaRPr lang="en-US" altLang="zh-CN" sz="800">
+              <a:solidFill>
+                <a:schemeClr val="bg1">
+                  <a:lumMod val="50000"/>
+                </a:schemeClr>
+              </a:solidFill>
+            </a:endParaRPr>
+          </a:p>
+        </p:txBody>
+      </p:sp>
+      <p:sp>
+        <p:nvSpPr>
+          <p:cNvPr id="28" name="圆角矩形 27"/>
+          <p:cNvSpPr/>
+          <p:nvPr>
+            <p:custDataLst>
+              <p:tags r:id="rId31"/>
+            </p:custDataLst>
+          </p:nvPr>
+        </p:nvSpPr>
+        <p:spPr>
+          <a:xfrm>
+            <a:off x="2594610" y="2047875"/>
+            <a:ext cx="1332865" cy="1313180"/>
+          </a:xfrm>
+          <a:prstGeom prst="roundRect">
+            <a:avLst>
+              <a:gd name="adj" fmla="val 4642"/>
+            </a:avLst>
+          </a:prstGeom>
+          <a:solidFill>
+            <a:schemeClr val="bg1"/>
+          </a:solidFill>
+          <a:ln>
+            <a:noFill/>
+          </a:ln>
+          <a:effectLst>
+            <a:outerShdw blurRad="127000" algn="ctr" rotWithShape="0">
+              <a:schemeClr val="tx1">
+                <a:alpha val="5000"/>
+              </a:schemeClr>
+            </a:outerShdw>
+          </a:effectLst>
+        </p:spPr>
+        <p:style>
+          <a:lnRef idx="2">
+            <a:schemeClr val="accent1">
+              <a:lumMod val="75000"/>
+            </a:schemeClr>
+          </a:lnRef>
+          <a:fillRef idx="1">
+            <a:schemeClr val="accent1"/>
+          </a:fillRef>
+          <a:effectRef idx="0">
+            <a:srgbClr val="FFFFFF"/>
+          </a:effectRef>
+          <a:fontRef idx="minor">
+            <a:schemeClr val="lt1"/>
+          </a:fontRef>
+        </p:style>
+        <p:txBody>
+          <a:bodyPr rtlCol="0" anchor="ctr"/>
+          <a:p>
+            <a:pPr algn="ctr"/>
+            <a:endParaRPr lang="zh-CN" altLang="en-US"/>
+          </a:p>
+        </p:txBody>
+      </p:sp>
+      <p:sp>
+        <p:nvSpPr>
+          <p:cNvPr id="29" name="文本框 28"/>
+          <p:cNvSpPr txBox="1"/>
+          <p:nvPr>
+            <p:custDataLst>
+              <p:tags r:id="rId32"/>
+            </p:custDataLst>
+          </p:nvPr>
+        </p:nvSpPr>
+        <p:spPr>
+          <a:xfrm>
+            <a:off x="2594610" y="3430270"/>
+            <a:ext cx="1332865" cy="224155"/>
+          </a:xfrm>
+          <a:prstGeom prst="rect">
+            <a:avLst/>
+          </a:prstGeom>
+          <a:solidFill>
+            <a:srgbClr val="F8F9FF"/>
+          </a:solidFill>
+        </p:spPr>
+        <p:txBody>
+          <a:bodyPr wrap="square" rtlCol="0">
+            <a:noAutofit/>
+          </a:bodyPr>
+          <a:p>
+            <a:pPr algn="ctr"/>
+            <a:r>
+              <a:rPr lang="zh-CN" altLang="en-US" sz="800">
+                <a:solidFill>
+                  <a:schemeClr val="bg1">
+                    <a:lumMod val="50000"/>
+                  </a:schemeClr>
+                </a:solidFill>
+              </a:rPr>
+              <a:t>工程</a:t>
+            </a:r>
+            <a:r>
+              <a:rPr lang="en-US" altLang="zh-CN" sz="800">
+                <a:solidFill>
+                  <a:schemeClr val="bg1">
+                    <a:lumMod val="50000"/>
+                  </a:schemeClr>
+                </a:solidFill>
+              </a:rPr>
+              <a:t>1</a:t>
+            </a:r>
+            <a:endParaRPr lang="en-US" altLang="zh-CN" sz="800">
+              <a:solidFill>
+                <a:schemeClr val="bg1">
+                  <a:lumMod val="50000"/>
+                </a:schemeClr>
+              </a:solidFill>
+            </a:endParaRPr>
+          </a:p>
+        </p:txBody>
+      </p:sp>
+      <p:sp>
+        <p:nvSpPr>
+          <p:cNvPr id="72" name="圆角矩形 71"/>
+          <p:cNvSpPr/>
+          <p:nvPr>
+            <p:custDataLst>
+              <p:tags r:id="rId33"/>
+            </p:custDataLst>
+          </p:nvPr>
+        </p:nvSpPr>
+        <p:spPr>
+          <a:xfrm>
+            <a:off x="2594610" y="3898265"/>
+            <a:ext cx="1332865" cy="1313180"/>
+          </a:xfrm>
+          <a:prstGeom prst="roundRect">
+            <a:avLst>
+              <a:gd name="adj" fmla="val 4642"/>
+            </a:avLst>
+          </a:prstGeom>
+          <a:solidFill>
+            <a:schemeClr val="bg1"/>
+          </a:solidFill>
+          <a:ln>
+            <a:noFill/>
+          </a:ln>
+          <a:effectLst>
+            <a:outerShdw blurRad="127000" algn="ctr" rotWithShape="0">
+              <a:schemeClr val="tx1">
+                <a:alpha val="5000"/>
+              </a:schemeClr>
+            </a:outerShdw>
+          </a:effectLst>
+        </p:spPr>
+        <p:style>
+          <a:lnRef idx="2">
+            <a:schemeClr val="accent1">
+              <a:lumMod val="75000"/>
+            </a:schemeClr>
+          </a:lnRef>
+          <a:fillRef idx="1">
+            <a:schemeClr val="accent1"/>
+          </a:fillRef>
+          <a:effectRef idx="0">
+            <a:srgbClr val="FFFFFF"/>
+          </a:effectRef>
+          <a:fontRef idx="minor">
+            <a:schemeClr val="lt1"/>
+          </a:fontRef>
+        </p:style>
+        <p:txBody>
+          <a:bodyPr rtlCol="0" anchor="ctr"/>
+          <a:p>
+            <a:pPr algn="ctr"/>
+            <a:endParaRPr lang="zh-CN" altLang="en-US"/>
+          </a:p>
+        </p:txBody>
+      </p:sp>
+      <p:sp>
+        <p:nvSpPr>
+          <p:cNvPr id="73" name="文本框 72"/>
+          <p:cNvSpPr txBox="1"/>
+          <p:nvPr>
+            <p:custDataLst>
+              <p:tags r:id="rId34"/>
+            </p:custDataLst>
+          </p:nvPr>
+        </p:nvSpPr>
+        <p:spPr>
+          <a:xfrm>
+            <a:off x="2594610" y="5280660"/>
+            <a:ext cx="1332865" cy="224155"/>
+          </a:xfrm>
+          <a:prstGeom prst="rect">
+            <a:avLst/>
+          </a:prstGeom>
+          <a:noFill/>
+        </p:spPr>
+        <p:txBody>
+          <a:bodyPr wrap="square" rtlCol="0">
+            <a:noAutofit/>
+          </a:bodyPr>
+          <a:p>
+            <a:pPr algn="ctr"/>
+            <a:r>
+              <a:rPr lang="zh-CN" altLang="en-US" sz="800">
+                <a:solidFill>
+                  <a:schemeClr val="bg1">
+                    <a:lumMod val="50000"/>
+                  </a:schemeClr>
+                </a:solidFill>
+              </a:rPr>
+              <a:t>工程</a:t>
+            </a:r>
+            <a:r>
+              <a:rPr lang="en-US" altLang="zh-CN" sz="800">
+                <a:solidFill>
+                  <a:schemeClr val="bg1">
+                    <a:lumMod val="50000"/>
+                  </a:schemeClr>
+                </a:solidFill>
+              </a:rPr>
+              <a:t>1</a:t>
+            </a:r>
+            <a:endParaRPr lang="en-US" altLang="zh-CN" sz="800">
+              <a:solidFill>
+                <a:schemeClr val="bg1">
+                  <a:lumMod val="50000"/>
+                </a:schemeClr>
+              </a:solidFill>
+            </a:endParaRPr>
+          </a:p>
+        </p:txBody>
+      </p:sp>
+      <p:sp>
+        <p:nvSpPr>
+          <p:cNvPr id="75" name="圆角矩形 74"/>
+          <p:cNvSpPr/>
+          <p:nvPr>
+            <p:custDataLst>
+              <p:tags r:id="rId35"/>
+            </p:custDataLst>
+          </p:nvPr>
+        </p:nvSpPr>
+        <p:spPr>
+          <a:xfrm>
+            <a:off x="4011930" y="3898265"/>
+            <a:ext cx="1332865" cy="1313180"/>
+          </a:xfrm>
+          <a:prstGeom prst="roundRect">
+            <a:avLst>
+              <a:gd name="adj" fmla="val 4642"/>
+            </a:avLst>
+          </a:prstGeom>
+          <a:solidFill>
+            <a:schemeClr val="bg1"/>
+          </a:solidFill>
+          <a:ln>
+            <a:noFill/>
+          </a:ln>
+          <a:effectLst>
+            <a:outerShdw blurRad="127000" algn="ctr" rotWithShape="0">
+              <a:schemeClr val="tx1">
+                <a:alpha val="5000"/>
+              </a:schemeClr>
+            </a:outerShdw>
+          </a:effectLst>
+        </p:spPr>
+        <p:style>
+          <a:lnRef idx="2">
+            <a:schemeClr val="accent1">
+              <a:lumMod val="75000"/>
+            </a:schemeClr>
+          </a:lnRef>
+          <a:fillRef idx="1">
+            <a:schemeClr val="accent1"/>
+          </a:fillRef>
+          <a:effectRef idx="0">
+            <a:srgbClr val="FFFFFF"/>
+          </a:effectRef>
+          <a:fontRef idx="minor">
+            <a:schemeClr val="lt1"/>
+          </a:fontRef>
+        </p:style>
+        <p:txBody>
+          <a:bodyPr rtlCol="0" anchor="ctr"/>
+          <a:p>
+            <a:pPr algn="ctr"/>
+            <a:endParaRPr lang="zh-CN" altLang="en-US"/>
+          </a:p>
+        </p:txBody>
+      </p:sp>
+      <p:sp>
+        <p:nvSpPr>
+          <p:cNvPr id="76" name="文本框 75"/>
+          <p:cNvSpPr txBox="1"/>
+          <p:nvPr>
+            <p:custDataLst>
+              <p:tags r:id="rId36"/>
+            </p:custDataLst>
+          </p:nvPr>
+        </p:nvSpPr>
+        <p:spPr>
+          <a:xfrm>
+            <a:off x="4011930" y="5280660"/>
+            <a:ext cx="1332865" cy="224155"/>
+          </a:xfrm>
+          <a:prstGeom prst="rect">
+            <a:avLst/>
+          </a:prstGeom>
+          <a:noFill/>
+        </p:spPr>
+        <p:txBody>
+          <a:bodyPr wrap="square" rtlCol="0">
+            <a:noAutofit/>
+          </a:bodyPr>
+          <a:p>
+            <a:pPr algn="ctr"/>
+            <a:r>
+              <a:rPr lang="zh-CN" altLang="en-US" sz="800">
+                <a:solidFill>
+                  <a:schemeClr val="bg1">
+                    <a:lumMod val="50000"/>
+                  </a:schemeClr>
+                </a:solidFill>
+              </a:rPr>
+              <a:t>工程</a:t>
+            </a:r>
+            <a:r>
+              <a:rPr lang="en-US" altLang="zh-CN" sz="800">
+                <a:solidFill>
+                  <a:schemeClr val="bg1">
+                    <a:lumMod val="50000"/>
+                  </a:schemeClr>
+                </a:solidFill>
+              </a:rPr>
+              <a:t>1</a:t>
+            </a:r>
+            <a:endParaRPr lang="en-US" altLang="zh-CN" sz="800">
+              <a:solidFill>
+                <a:schemeClr val="bg1">
+                  <a:lumMod val="50000"/>
+                </a:schemeClr>
+              </a:solidFill>
+            </a:endParaRPr>
+          </a:p>
+        </p:txBody>
+      </p:sp>
+      <p:sp>
+        <p:nvSpPr>
+          <p:cNvPr id="78" name="圆角矩形 77"/>
+          <p:cNvSpPr/>
+          <p:nvPr>
+            <p:custDataLst>
+              <p:tags r:id="rId37"/>
+            </p:custDataLst>
+          </p:nvPr>
+        </p:nvSpPr>
+        <p:spPr>
+          <a:xfrm>
+            <a:off x="5429250" y="3898265"/>
+            <a:ext cx="1332865" cy="1313180"/>
+          </a:xfrm>
+          <a:prstGeom prst="roundRect">
+            <a:avLst>
+              <a:gd name="adj" fmla="val 4642"/>
+            </a:avLst>
+          </a:prstGeom>
+          <a:solidFill>
+            <a:schemeClr val="bg1"/>
+          </a:solidFill>
+          <a:ln>
+            <a:noFill/>
+          </a:ln>
+          <a:effectLst>
+            <a:outerShdw blurRad="127000" algn="ctr" rotWithShape="0">
+              <a:schemeClr val="tx1">
+                <a:alpha val="5000"/>
+              </a:schemeClr>
+            </a:outerShdw>
+          </a:effectLst>
+        </p:spPr>
+        <p:style>
+          <a:lnRef idx="2">
+            <a:schemeClr val="accent1">
+              <a:lumMod val="75000"/>
+            </a:schemeClr>
+          </a:lnRef>
+          <a:fillRef idx="1">
+            <a:schemeClr val="accent1"/>
+          </a:fillRef>
+          <a:effectRef idx="0">
+            <a:srgbClr val="FFFFFF"/>
+          </a:effectRef>
+          <a:fontRef idx="minor">
+            <a:schemeClr val="lt1"/>
+          </a:fontRef>
+        </p:style>
+        <p:txBody>
+          <a:bodyPr rtlCol="0" anchor="ctr"/>
+          <a:p>
+            <a:pPr algn="ctr"/>
+            <a:endParaRPr lang="zh-CN" altLang="en-US"/>
+          </a:p>
+        </p:txBody>
+      </p:sp>
+      <p:sp>
+        <p:nvSpPr>
+          <p:cNvPr id="79" name="文本框 78"/>
+          <p:cNvSpPr txBox="1"/>
+          <p:nvPr>
+            <p:custDataLst>
+              <p:tags r:id="rId38"/>
+            </p:custDataLst>
+          </p:nvPr>
+        </p:nvSpPr>
+        <p:spPr>
+          <a:xfrm>
+            <a:off x="5429250" y="5280660"/>
+            <a:ext cx="1332865" cy="224155"/>
+          </a:xfrm>
+          <a:prstGeom prst="rect">
+            <a:avLst/>
+          </a:prstGeom>
+          <a:noFill/>
+        </p:spPr>
+        <p:txBody>
+          <a:bodyPr wrap="square" rtlCol="0">
+            <a:noAutofit/>
+          </a:bodyPr>
+          <a:p>
+            <a:pPr algn="ctr"/>
+            <a:r>
+              <a:rPr lang="zh-CN" altLang="en-US" sz="800">
+                <a:solidFill>
+                  <a:schemeClr val="bg1">
+                    <a:lumMod val="50000"/>
+                  </a:schemeClr>
+                </a:solidFill>
+              </a:rPr>
+              <a:t>工程</a:t>
+            </a:r>
+            <a:r>
+              <a:rPr lang="en-US" altLang="zh-CN" sz="800">
+                <a:solidFill>
+                  <a:schemeClr val="bg1">
+                    <a:lumMod val="50000"/>
+                  </a:schemeClr>
+                </a:solidFill>
+              </a:rPr>
+              <a:t>1</a:t>
+            </a:r>
+            <a:endParaRPr lang="en-US" altLang="zh-CN" sz="800">
+              <a:solidFill>
+                <a:schemeClr val="bg1">
+                  <a:lumMod val="50000"/>
+                </a:schemeClr>
+              </a:solidFill>
+            </a:endParaRPr>
+          </a:p>
+        </p:txBody>
+      </p:sp>
+      <p:sp>
+        <p:nvSpPr>
+          <p:cNvPr id="81" name="圆角矩形 80"/>
+          <p:cNvSpPr/>
+          <p:nvPr>
+            <p:custDataLst>
+              <p:tags r:id="rId39"/>
+            </p:custDataLst>
+          </p:nvPr>
+        </p:nvSpPr>
+        <p:spPr>
+          <a:xfrm>
+            <a:off x="6846570" y="3898265"/>
+            <a:ext cx="1332865" cy="1313180"/>
+          </a:xfrm>
+          <a:prstGeom prst="roundRect">
+            <a:avLst>
+              <a:gd name="adj" fmla="val 4642"/>
+            </a:avLst>
+          </a:prstGeom>
+          <a:solidFill>
+            <a:schemeClr val="bg1"/>
+          </a:solidFill>
+          <a:ln>
+            <a:noFill/>
+          </a:ln>
+          <a:effectLst>
+            <a:outerShdw blurRad="127000" algn="ctr" rotWithShape="0">
+              <a:schemeClr val="tx1">
+                <a:alpha val="5000"/>
+              </a:schemeClr>
+            </a:outerShdw>
+          </a:effectLst>
+        </p:spPr>
+        <p:style>
+          <a:lnRef idx="2">
+            <a:schemeClr val="accent1">
+              <a:lumMod val="75000"/>
+            </a:schemeClr>
+          </a:lnRef>
+          <a:fillRef idx="1">
+            <a:schemeClr val="accent1"/>
+          </a:fillRef>
+          <a:effectRef idx="0">
+            <a:srgbClr val="FFFFFF"/>
+          </a:effectRef>
+          <a:fontRef idx="minor">
+            <a:schemeClr val="lt1"/>
+          </a:fontRef>
+        </p:style>
+        <p:txBody>
+          <a:bodyPr rtlCol="0" anchor="ctr"/>
+          <a:p>
+            <a:pPr algn="ctr"/>
+            <a:endParaRPr lang="zh-CN" altLang="en-US"/>
+          </a:p>
+        </p:txBody>
+      </p:sp>
+      <p:sp>
+        <p:nvSpPr>
+          <p:cNvPr id="82" name="文本框 81"/>
+          <p:cNvSpPr txBox="1"/>
+          <p:nvPr>
+            <p:custDataLst>
+              <p:tags r:id="rId40"/>
+            </p:custDataLst>
+          </p:nvPr>
+        </p:nvSpPr>
+        <p:spPr>
+          <a:xfrm>
+            <a:off x="6846570" y="5280660"/>
+            <a:ext cx="1332865" cy="224155"/>
+          </a:xfrm>
+          <a:prstGeom prst="rect">
+            <a:avLst/>
+          </a:prstGeom>
+          <a:noFill/>
+        </p:spPr>
+        <p:txBody>
+          <a:bodyPr wrap="square" rtlCol="0">
+            <a:noAutofit/>
+          </a:bodyPr>
+          <a:p>
+            <a:pPr algn="ctr"/>
+            <a:r>
+              <a:rPr lang="zh-CN" altLang="en-US" sz="800">
+                <a:solidFill>
+                  <a:schemeClr val="bg1">
+                    <a:lumMod val="50000"/>
+                  </a:schemeClr>
+                </a:solidFill>
+              </a:rPr>
+              <a:t>工程</a:t>
+            </a:r>
+            <a:r>
+              <a:rPr lang="en-US" altLang="zh-CN" sz="800">
+                <a:solidFill>
+                  <a:schemeClr val="bg1">
+                    <a:lumMod val="50000"/>
+                  </a:schemeClr>
+                </a:solidFill>
+              </a:rPr>
+              <a:t>1</a:t>
+            </a:r>
+            <a:endParaRPr lang="en-US" altLang="zh-CN" sz="800">
+              <a:solidFill>
+                <a:schemeClr val="bg1">
+                  <a:lumMod val="50000"/>
+                </a:schemeClr>
+              </a:solidFill>
+            </a:endParaRPr>
+          </a:p>
+        </p:txBody>
+      </p:sp>
+      <p:pic>
+        <p:nvPicPr>
+          <p:cNvPr id="12" name="图片 11" descr="下载"/>
+          <p:cNvPicPr>
+            <a:picLocks noChangeAspect="1"/>
+          </p:cNvPicPr>
+          <p:nvPr/>
+        </p:nvPicPr>
+        <p:blipFill>
+          <a:blip r:embed="rId41"/>
+          <a:stretch>
+            <a:fillRect/>
+          </a:stretch>
+        </p:blipFill>
+        <p:spPr>
+          <a:xfrm>
+            <a:off x="527050" y="1111250"/>
+            <a:ext cx="196215" cy="196215"/>
+          </a:xfrm>
+          <a:prstGeom prst="rect">
+            <a:avLst/>
+          </a:prstGeom>
+        </p:spPr>
+      </p:pic>
+      <p:pic>
+        <p:nvPicPr>
+          <p:cNvPr id="22" name="图片 21" descr="C[3JZ}P)WL8}V$5E@TWUQZ7"/>
+          <p:cNvPicPr>
+            <a:picLocks noChangeAspect="1"/>
+          </p:cNvPicPr>
+          <p:nvPr/>
+        </p:nvPicPr>
+        <p:blipFill>
+          <a:blip r:embed="rId42"/>
+          <a:stretch>
+            <a:fillRect/>
+          </a:stretch>
+        </p:blipFill>
+        <p:spPr>
+          <a:xfrm>
+            <a:off x="0" y="1266190"/>
+            <a:ext cx="615315" cy="574040"/>
+          </a:xfrm>
+          <a:prstGeom prst="rect">
+            <a:avLst/>
+          </a:prstGeom>
+        </p:spPr>
+      </p:pic>
+    </p:spTree>
+  </p:cSld>
+  <p:clrMapOvr>
+    <a:masterClrMapping/>
+  </p:clrMapOvr>
+</p:sld>
+</file>
+
+<file path=ppt/slides/slide3.xml><?xml version="1.0" encoding="utf-8"?>
 <p:sld xmlns:a="http://schemas.openxmlformats.org/drawingml/2006/main" xmlns:r="http://schemas.openxmlformats.org/officeDocument/2006/relationships" xmlns:p="http://schemas.openxmlformats.org/presentationml/2006/main">
   <p:cSld>
     <p:spTree>
@@ -6000,7 +8583,7 @@
 </p:sld>
 </file>
 
-<file path=ppt/slides/slide3.xml><?xml version="1.0" encoding="utf-8"?>
+<file path=ppt/slides/slide4.xml><?xml version="1.0" encoding="utf-8"?>
 <p:sld xmlns:a="http://schemas.openxmlformats.org/drawingml/2006/main" xmlns:r="http://schemas.openxmlformats.org/officeDocument/2006/relationships" xmlns:p="http://schemas.openxmlformats.org/presentationml/2006/main">
   <p:cSld>
     <p:spTree>
@@ -9996,7 +12579,7 @@
 </p:sld>
 </file>
 
-<file path=ppt/slides/slide4.xml><?xml version="1.0" encoding="utf-8"?>
+<file path=ppt/slides/slide5.xml><?xml version="1.0" encoding="utf-8"?>
 <p:sld xmlns:a="http://schemas.openxmlformats.org/drawingml/2006/main" xmlns:r="http://schemas.openxmlformats.org/officeDocument/2006/relationships" xmlns:p="http://schemas.openxmlformats.org/presentationml/2006/main">
   <p:cSld>
     <p:spTree>
@@ -13616,7 +16199,7 @@
 </p:sld>
 </file>
 
-<file path=ppt/slides/slide5.xml><?xml version="1.0" encoding="utf-8"?>
+<file path=ppt/slides/slide6.xml><?xml version="1.0" encoding="utf-8"?>
 <p:sld xmlns:a="http://schemas.openxmlformats.org/drawingml/2006/main" xmlns:r="http://schemas.openxmlformats.org/officeDocument/2006/relationships" xmlns:p="http://schemas.openxmlformats.org/presentationml/2006/main">
   <p:cSld>
     <p:spTree>
@@ -15106,7 +17689,19 @@
 
 <file path=ppt/tags/tag137.xml><?xml version="1.0" encoding="utf-8"?>
 <p:tagLst xmlns:p="http://schemas.openxmlformats.org/presentationml/2006/main">
-  <p:tag name="commondata" val="eyJoZGlkIjoiN2YwMzgxYjM1YjAwNzk4NjQ1NjAxN2M5ZWM1OGNkZTkifQ=="/>
+  <p:tag name="KSO_WM_BEAUTIFY_FLAG" val=""/>
+</p:tagLst>
+</file>
+
+<file path=ppt/tags/tag138.xml><?xml version="1.0" encoding="utf-8"?>
+<p:tagLst xmlns:p="http://schemas.openxmlformats.org/presentationml/2006/main">
+  <p:tag name="KSO_WM_BEAUTIFY_FLAG" val=""/>
+</p:tagLst>
+</file>
+
+<file path=ppt/tags/tag139.xml><?xml version="1.0" encoding="utf-8"?>
+<p:tagLst xmlns:p="http://schemas.openxmlformats.org/presentationml/2006/main">
+  <p:tag name="KSO_WM_BEAUTIFY_FLAG" val=""/>
 </p:tagLst>
 </file>
 
@@ -15116,21 +17711,219 @@
 </p:tagLst>
 </file>
 
+<file path=ppt/tags/tag140.xml><?xml version="1.0" encoding="utf-8"?>
+<p:tagLst xmlns:p="http://schemas.openxmlformats.org/presentationml/2006/main">
+  <p:tag name="KSO_WM_BEAUTIFY_FLAG" val=""/>
+</p:tagLst>
+</file>
+
+<file path=ppt/tags/tag141.xml><?xml version="1.0" encoding="utf-8"?>
+<p:tagLst xmlns:p="http://schemas.openxmlformats.org/presentationml/2006/main">
+  <p:tag name="KSO_WM_BEAUTIFY_FLAG" val=""/>
+</p:tagLst>
+</file>
+
+<file path=ppt/tags/tag142.xml><?xml version="1.0" encoding="utf-8"?>
+<p:tagLst xmlns:p="http://schemas.openxmlformats.org/presentationml/2006/main">
+  <p:tag name="KSO_WM_BEAUTIFY_FLAG" val=""/>
+</p:tagLst>
+</file>
+
+<file path=ppt/tags/tag143.xml><?xml version="1.0" encoding="utf-8"?>
+<p:tagLst xmlns:p="http://schemas.openxmlformats.org/presentationml/2006/main">
+  <p:tag name="KSO_WM_BEAUTIFY_FLAG" val=""/>
+</p:tagLst>
+</file>
+
+<file path=ppt/tags/tag144.xml><?xml version="1.0" encoding="utf-8"?>
+<p:tagLst xmlns:p="http://schemas.openxmlformats.org/presentationml/2006/main">
+  <p:tag name="KSO_WM_BEAUTIFY_FLAG" val=""/>
+</p:tagLst>
+</file>
+
+<file path=ppt/tags/tag145.xml><?xml version="1.0" encoding="utf-8"?>
+<p:tagLst xmlns:p="http://schemas.openxmlformats.org/presentationml/2006/main">
+  <p:tag name="KSO_WM_BEAUTIFY_FLAG" val=""/>
+</p:tagLst>
+</file>
+
+<file path=ppt/tags/tag146.xml><?xml version="1.0" encoding="utf-8"?>
+<p:tagLst xmlns:p="http://schemas.openxmlformats.org/presentationml/2006/main">
+  <p:tag name="KSO_WM_BEAUTIFY_FLAG" val=""/>
+</p:tagLst>
+</file>
+
+<file path=ppt/tags/tag147.xml><?xml version="1.0" encoding="utf-8"?>
+<p:tagLst xmlns:p="http://schemas.openxmlformats.org/presentationml/2006/main">
+  <p:tag name="KSO_WM_BEAUTIFY_FLAG" val=""/>
+</p:tagLst>
+</file>
+
+<file path=ppt/tags/tag148.xml><?xml version="1.0" encoding="utf-8"?>
+<p:tagLst xmlns:p="http://schemas.openxmlformats.org/presentationml/2006/main">
+  <p:tag name="KSO_WM_BEAUTIFY_FLAG" val=""/>
+</p:tagLst>
+</file>
+
+<file path=ppt/tags/tag149.xml><?xml version="1.0" encoding="utf-8"?>
+<p:tagLst xmlns:p="http://schemas.openxmlformats.org/presentationml/2006/main">
+  <p:tag name="KSO_WM_BEAUTIFY_FLAG" val=""/>
+</p:tagLst>
+</file>
+
 <file path=ppt/tags/tag15.xml><?xml version="1.0" encoding="utf-8"?>
 <p:tagLst xmlns:p="http://schemas.openxmlformats.org/presentationml/2006/main">
   <p:tag name="KSO_WM_BEAUTIFY_FLAG" val=""/>
 </p:tagLst>
 </file>
 
+<file path=ppt/tags/tag150.xml><?xml version="1.0" encoding="utf-8"?>
+<p:tagLst xmlns:p="http://schemas.openxmlformats.org/presentationml/2006/main">
+  <p:tag name="KSO_WM_BEAUTIFY_FLAG" val=""/>
+</p:tagLst>
+</file>
+
+<file path=ppt/tags/tag151.xml><?xml version="1.0" encoding="utf-8"?>
+<p:tagLst xmlns:p="http://schemas.openxmlformats.org/presentationml/2006/main">
+  <p:tag name="KSO_WM_BEAUTIFY_FLAG" val=""/>
+</p:tagLst>
+</file>
+
+<file path=ppt/tags/tag152.xml><?xml version="1.0" encoding="utf-8"?>
+<p:tagLst xmlns:p="http://schemas.openxmlformats.org/presentationml/2006/main">
+  <p:tag name="KSO_WM_BEAUTIFY_FLAG" val=""/>
+</p:tagLst>
+</file>
+
+<file path=ppt/tags/tag153.xml><?xml version="1.0" encoding="utf-8"?>
+<p:tagLst xmlns:p="http://schemas.openxmlformats.org/presentationml/2006/main">
+  <p:tag name="KSO_WM_BEAUTIFY_FLAG" val=""/>
+</p:tagLst>
+</file>
+
+<file path=ppt/tags/tag154.xml><?xml version="1.0" encoding="utf-8"?>
+<p:tagLst xmlns:p="http://schemas.openxmlformats.org/presentationml/2006/main">
+  <p:tag name="KSO_WM_BEAUTIFY_FLAG" val=""/>
+</p:tagLst>
+</file>
+
+<file path=ppt/tags/tag155.xml><?xml version="1.0" encoding="utf-8"?>
+<p:tagLst xmlns:p="http://schemas.openxmlformats.org/presentationml/2006/main">
+  <p:tag name="KSO_WM_BEAUTIFY_FLAG" val=""/>
+</p:tagLst>
+</file>
+
+<file path=ppt/tags/tag156.xml><?xml version="1.0" encoding="utf-8"?>
+<p:tagLst xmlns:p="http://schemas.openxmlformats.org/presentationml/2006/main">
+  <p:tag name="KSO_WM_BEAUTIFY_FLAG" val=""/>
+</p:tagLst>
+</file>
+
+<file path=ppt/tags/tag157.xml><?xml version="1.0" encoding="utf-8"?>
+<p:tagLst xmlns:p="http://schemas.openxmlformats.org/presentationml/2006/main">
+  <p:tag name="KSO_WM_BEAUTIFY_FLAG" val=""/>
+</p:tagLst>
+</file>
+
+<file path=ppt/tags/tag158.xml><?xml version="1.0" encoding="utf-8"?>
+<p:tagLst xmlns:p="http://schemas.openxmlformats.org/presentationml/2006/main">
+  <p:tag name="KSO_WM_BEAUTIFY_FLAG" val=""/>
+</p:tagLst>
+</file>
+
+<file path=ppt/tags/tag159.xml><?xml version="1.0" encoding="utf-8"?>
+<p:tagLst xmlns:p="http://schemas.openxmlformats.org/presentationml/2006/main">
+  <p:tag name="KSO_WM_BEAUTIFY_FLAG" val=""/>
+</p:tagLst>
+</file>
+
 <file path=ppt/tags/tag16.xml><?xml version="1.0" encoding="utf-8"?>
 <p:tagLst xmlns:p="http://schemas.openxmlformats.org/presentationml/2006/main">
   <p:tag name="KSO_WM_BEAUTIFY_FLAG" val=""/>
 </p:tagLst>
 </file>
 
+<file path=ppt/tags/tag160.xml><?xml version="1.0" encoding="utf-8"?>
+<p:tagLst xmlns:p="http://schemas.openxmlformats.org/presentationml/2006/main">
+  <p:tag name="KSO_WM_BEAUTIFY_FLAG" val=""/>
+</p:tagLst>
+</file>
+
+<file path=ppt/tags/tag161.xml><?xml version="1.0" encoding="utf-8"?>
+<p:tagLst xmlns:p="http://schemas.openxmlformats.org/presentationml/2006/main">
+  <p:tag name="KSO_WM_BEAUTIFY_FLAG" val=""/>
+</p:tagLst>
+</file>
+
+<file path=ppt/tags/tag162.xml><?xml version="1.0" encoding="utf-8"?>
+<p:tagLst xmlns:p="http://schemas.openxmlformats.org/presentationml/2006/main">
+  <p:tag name="KSO_WM_BEAUTIFY_FLAG" val=""/>
+</p:tagLst>
+</file>
+
+<file path=ppt/tags/tag163.xml><?xml version="1.0" encoding="utf-8"?>
+<p:tagLst xmlns:p="http://schemas.openxmlformats.org/presentationml/2006/main">
+  <p:tag name="KSO_WM_BEAUTIFY_FLAG" val=""/>
+</p:tagLst>
+</file>
+
+<file path=ppt/tags/tag164.xml><?xml version="1.0" encoding="utf-8"?>
+<p:tagLst xmlns:p="http://schemas.openxmlformats.org/presentationml/2006/main">
+  <p:tag name="KSO_WM_BEAUTIFY_FLAG" val=""/>
+</p:tagLst>
+</file>
+
+<file path=ppt/tags/tag165.xml><?xml version="1.0" encoding="utf-8"?>
+<p:tagLst xmlns:p="http://schemas.openxmlformats.org/presentationml/2006/main">
+  <p:tag name="KSO_WM_BEAUTIFY_FLAG" val=""/>
+</p:tagLst>
+</file>
+
+<file path=ppt/tags/tag166.xml><?xml version="1.0" encoding="utf-8"?>
+<p:tagLst xmlns:p="http://schemas.openxmlformats.org/presentationml/2006/main">
+  <p:tag name="KSO_WM_BEAUTIFY_FLAG" val=""/>
+</p:tagLst>
+</file>
+
+<file path=ppt/tags/tag167.xml><?xml version="1.0" encoding="utf-8"?>
+<p:tagLst xmlns:p="http://schemas.openxmlformats.org/presentationml/2006/main">
+  <p:tag name="KSO_WM_BEAUTIFY_FLAG" val=""/>
+</p:tagLst>
+</file>
+
+<file path=ppt/tags/tag168.xml><?xml version="1.0" encoding="utf-8"?>
+<p:tagLst xmlns:p="http://schemas.openxmlformats.org/presentationml/2006/main">
+  <p:tag name="KSO_WM_BEAUTIFY_FLAG" val=""/>
+</p:tagLst>
+</file>
+
+<file path=ppt/tags/tag169.xml><?xml version="1.0" encoding="utf-8"?>
+<p:tagLst xmlns:p="http://schemas.openxmlformats.org/presentationml/2006/main">
+  <p:tag name="KSO_WM_BEAUTIFY_FLAG" val=""/>
+</p:tagLst>
+</file>
+
 <file path=ppt/tags/tag17.xml><?xml version="1.0" encoding="utf-8"?>
 <p:tagLst xmlns:p="http://schemas.openxmlformats.org/presentationml/2006/main">
   <p:tag name="KSO_WM_BEAUTIFY_FLAG" val=""/>
+</p:tagLst>
+</file>
+
+<file path=ppt/tags/tag170.xml><?xml version="1.0" encoding="utf-8"?>
+<p:tagLst xmlns:p="http://schemas.openxmlformats.org/presentationml/2006/main">
+  <p:tag name="KSO_WM_BEAUTIFY_FLAG" val=""/>
+</p:tagLst>
+</file>
+
+<file path=ppt/tags/tag171.xml><?xml version="1.0" encoding="utf-8"?>
+<p:tagLst xmlns:p="http://schemas.openxmlformats.org/presentationml/2006/main">
+  <p:tag name="KSO_WM_BEAUTIFY_FLAG" val=""/>
+</p:tagLst>
+</file>
+
+<file path=ppt/tags/tag172.xml><?xml version="1.0" encoding="utf-8"?>
+<p:tagLst xmlns:p="http://schemas.openxmlformats.org/presentationml/2006/main">
+  <p:tag name="commondata" val="eyJoZGlkIjoiN2YwMzgxYjM1YjAwNzk4NjQ1NjAxN2M5ZWM1OGNkZTkifQ=="/>
 </p:tagLst>
 </file>
 
